--- a/outputs/6648-kawaden-slides.pptx
+++ b/outputs/6648-kawaden-slides.pptx
@@ -3184,14 +3184,14 @@
           <a:noFill/>
         </p:spPr>
         <p:txBody>
-          <a:bodyPr wrap="square" lIns="45720" rIns="45720" tIns="18288" bIns="18288">
-            <a:spAutoFit/>
+          <a:bodyPr wrap="square" anchor="t" lIns="0" rIns="0" tIns="0" bIns="0">
+            <a:noAutofit/>
           </a:bodyPr>
           <a:lstStyle/>
           <a:p>
             <a:pPr algn="ctr"/>
             <a:r>
-              <a:rPr sz="5400" b="1">
+              <a:rPr sz="5400" b="1" i="0">
                 <a:solidFill>
                   <a:srgbClr val="1F4E78"/>
                 </a:solidFill>
@@ -3218,14 +3218,14 @@
           <a:noFill/>
         </p:spPr>
         <p:txBody>
-          <a:bodyPr wrap="square" lIns="45720" rIns="45720" tIns="18288" bIns="18288">
-            <a:spAutoFit/>
+          <a:bodyPr wrap="square" anchor="t" lIns="0" rIns="0" tIns="0" bIns="0">
+            <a:noAutofit/>
           </a:bodyPr>
           <a:lstStyle/>
           <a:p>
             <a:pPr algn="ctr"/>
             <a:r>
-              <a:rPr sz="2600" b="0">
+              <a:rPr sz="2600" b="0" i="0">
                 <a:solidFill>
                   <a:srgbClr val="202020"/>
                 </a:solidFill>
@@ -3252,14 +3252,14 @@
           <a:noFill/>
         </p:spPr>
         <p:txBody>
-          <a:bodyPr wrap="square" lIns="45720" rIns="45720" tIns="18288" bIns="18288">
-            <a:spAutoFit/>
+          <a:bodyPr wrap="square" anchor="t" lIns="0" rIns="0" tIns="0" bIns="0">
+            <a:noAutofit/>
           </a:bodyPr>
           <a:lstStyle/>
           <a:p>
             <a:pPr algn="ctr"/>
             <a:r>
-              <a:rPr sz="2600" b="0">
+              <a:rPr sz="2600" b="0" i="0">
                 <a:solidFill>
                   <a:srgbClr val="202020"/>
                 </a:solidFill>
@@ -3286,14 +3286,14 @@
           <a:noFill/>
         </p:spPr>
         <p:txBody>
-          <a:bodyPr wrap="square" lIns="45720" rIns="45720" tIns="18288" bIns="18288">
-            <a:spAutoFit/>
+          <a:bodyPr wrap="square" anchor="t" lIns="0" rIns="0" tIns="0" bIns="0">
+            <a:noAutofit/>
           </a:bodyPr>
           <a:lstStyle/>
           <a:p>
             <a:pPr algn="ctr"/>
             <a:r>
-              <a:rPr sz="2600" b="0">
+              <a:rPr sz="2600" b="0" i="0">
                 <a:solidFill>
                   <a:srgbClr val="202020"/>
                 </a:solidFill>
@@ -3320,14 +3320,14 @@
           <a:noFill/>
         </p:spPr>
         <p:txBody>
-          <a:bodyPr wrap="square" lIns="45720" rIns="45720" tIns="18288" bIns="18288">
-            <a:spAutoFit/>
+          <a:bodyPr wrap="square" anchor="t" lIns="0" rIns="0" tIns="0" bIns="0">
+            <a:noAutofit/>
           </a:bodyPr>
           <a:lstStyle/>
           <a:p>
             <a:pPr algn="ctr"/>
             <a:r>
-              <a:rPr sz="1800" b="0">
+              <a:rPr sz="1800" b="0" i="0">
                 <a:solidFill>
                   <a:srgbClr val="808080"/>
                 </a:solidFill>
@@ -3406,8 +3406,8 @@
         </p:nvSpPr>
         <p:spPr>
           <a:xfrm>
-            <a:off x="457200" y="457200"/>
-            <a:ext cx="11277295" cy="822960"/>
+            <a:off x="457200" y="365760"/>
+            <a:ext cx="11277295" cy="914400"/>
           </a:xfrm>
           <a:prstGeom prst="rect">
             <a:avLst/>
@@ -3415,14 +3415,14 @@
           <a:noFill/>
         </p:spPr>
         <p:txBody>
-          <a:bodyPr wrap="square" lIns="45720" rIns="45720" tIns="18288" bIns="18288">
-            <a:spAutoFit/>
+          <a:bodyPr wrap="square" anchor="ctr" lIns="0" rIns="0" tIns="0" bIns="0">
+            <a:noAutofit/>
           </a:bodyPr>
           <a:lstStyle/>
           <a:p>
             <a:pPr algn="l"/>
             <a:r>
-              <a:rPr sz="3000" b="1">
+              <a:rPr sz="2800" b="1" i="0">
                 <a:solidFill>
                   <a:srgbClr val="1F4E78"/>
                 </a:solidFill>
@@ -3440,8 +3440,8 @@
         </p:nvSpPr>
         <p:spPr>
           <a:xfrm>
-            <a:off x="457200" y="1234440"/>
-            <a:ext cx="1828800" cy="36576"/>
+            <a:off x="457200" y="1298448"/>
+            <a:ext cx="2194560" cy="36576"/>
           </a:xfrm>
           <a:prstGeom prst="rect">
             <a:avLst/>
@@ -3483,8 +3483,8 @@
         </p:nvSpPr>
         <p:spPr>
           <a:xfrm>
-            <a:off x="457200" y="1463040"/>
-            <a:ext cx="11277295" cy="640080"/>
+            <a:off x="457200" y="1508760"/>
+            <a:ext cx="11277295" cy="502920"/>
           </a:xfrm>
           <a:prstGeom prst="rect">
             <a:avLst/>
@@ -3492,14 +3492,14 @@
           <a:noFill/>
         </p:spPr>
         <p:txBody>
-          <a:bodyPr wrap="square" lIns="45720" rIns="45720" tIns="18288" bIns="18288">
-            <a:spAutoFit/>
+          <a:bodyPr wrap="square" anchor="ctr" lIns="0" rIns="0" tIns="0" bIns="0">
+            <a:noAutofit/>
           </a:bodyPr>
           <a:lstStyle/>
           <a:p>
             <a:pPr algn="l"/>
             <a:r>
-              <a:rPr sz="2200" b="1">
+              <a:rPr sz="2000" b="1" i="0">
                 <a:solidFill>
                   <a:srgbClr val="C0392B"/>
                 </a:solidFill>
@@ -3518,7 +3518,7 @@
           <p:nvPr/>
         </p:nvGraphicFramePr>
         <p:xfrm>
-          <a:off x="457200" y="2286000"/>
+          <a:off x="457200" y="2148840"/>
           <a:ext cx="11277295" cy="1371600"/>
         </p:xfrm>
         <a:graphic>
@@ -3690,14 +3690,14 @@
           <a:noFill/>
         </p:spPr>
         <p:txBody>
-          <a:bodyPr wrap="square" lIns="45720" rIns="45720" tIns="18288" bIns="18288">
-            <a:spAutoFit/>
+          <a:bodyPr wrap="square" anchor="ctr" lIns="0" rIns="0" tIns="0" bIns="0">
+            <a:noAutofit/>
           </a:bodyPr>
           <a:lstStyle/>
           <a:p>
             <a:pPr algn="l"/>
             <a:r>
-              <a:rPr sz="1100" b="0">
+              <a:rPr sz="1100" b="0" i="1">
                 <a:solidFill>
                   <a:srgbClr val="808080"/>
                 </a:solidFill>
@@ -3733,8 +3733,8 @@
         </p:nvSpPr>
         <p:spPr>
           <a:xfrm>
-            <a:off x="457200" y="457200"/>
-            <a:ext cx="11277295" cy="822960"/>
+            <a:off x="457200" y="365760"/>
+            <a:ext cx="11277295" cy="914400"/>
           </a:xfrm>
           <a:prstGeom prst="rect">
             <a:avLst/>
@@ -3742,14 +3742,14 @@
           <a:noFill/>
         </p:spPr>
         <p:txBody>
-          <a:bodyPr wrap="square" lIns="45720" rIns="45720" tIns="18288" bIns="18288">
-            <a:spAutoFit/>
+          <a:bodyPr wrap="square" anchor="ctr" lIns="0" rIns="0" tIns="0" bIns="0">
+            <a:noAutofit/>
           </a:bodyPr>
           <a:lstStyle/>
           <a:p>
             <a:pPr algn="l"/>
             <a:r>
-              <a:rPr sz="3000" b="1">
+              <a:rPr sz="2800" b="1" i="0">
                 <a:solidFill>
                   <a:srgbClr val="1F4E78"/>
                 </a:solidFill>
@@ -3767,8 +3767,8 @@
         </p:nvSpPr>
         <p:spPr>
           <a:xfrm>
-            <a:off x="457200" y="1234440"/>
-            <a:ext cx="1828800" cy="36576"/>
+            <a:off x="457200" y="1298448"/>
+            <a:ext cx="2194560" cy="36576"/>
           </a:xfrm>
           <a:prstGeom prst="rect">
             <a:avLst/>
@@ -3810,8 +3810,8 @@
         </p:nvSpPr>
         <p:spPr>
           <a:xfrm>
-            <a:off x="457200" y="1463040"/>
-            <a:ext cx="11277295" cy="640080"/>
+            <a:off x="457200" y="1508760"/>
+            <a:ext cx="11277295" cy="502920"/>
           </a:xfrm>
           <a:prstGeom prst="rect">
             <a:avLst/>
@@ -3819,14 +3819,14 @@
           <a:noFill/>
         </p:spPr>
         <p:txBody>
-          <a:bodyPr wrap="square" lIns="45720" rIns="45720" tIns="18288" bIns="18288">
-            <a:spAutoFit/>
+          <a:bodyPr wrap="square" anchor="ctr" lIns="0" rIns="0" tIns="0" bIns="0">
+            <a:noAutofit/>
           </a:bodyPr>
           <a:lstStyle/>
           <a:p>
             <a:pPr algn="l"/>
             <a:r>
-              <a:rPr sz="2200" b="1">
+              <a:rPr sz="2000" b="1" i="0">
                 <a:solidFill>
                   <a:srgbClr val="C0392B"/>
                 </a:solidFill>
@@ -3844,8 +3844,8 @@
         </p:nvSpPr>
         <p:spPr>
           <a:xfrm>
-            <a:off x="640080" y="2286000"/>
-            <a:ext cx="10911535" cy="4069080"/>
+            <a:off x="640080" y="2148840"/>
+            <a:ext cx="10911535" cy="4114800"/>
           </a:xfrm>
           <a:prstGeom prst="rect">
             <a:avLst/>
@@ -3853,15 +3853,18 @@
           <a:noFill/>
         </p:spPr>
         <p:txBody>
-          <a:bodyPr wrap="square" lIns="45720" rIns="45720">
-            <a:spAutoFit/>
+          <a:bodyPr wrap="square" anchor="t" lIns="0" rIns="0" tIns="0" bIns="0">
+            <a:noAutofit/>
           </a:bodyPr>
           <a:lstStyle/>
           <a:p>
             <a:pPr algn="l">
               <a:lnSpc>
-                <a:spcPct val="130000"/>
+                <a:spcPct val="135000"/>
               </a:lnSpc>
+              <a:spcAft>
+                <a:spcPts val="600"/>
+              </a:spcAft>
             </a:pPr>
             <a:r>
               <a:rPr sz="1800">
@@ -3875,8 +3878,11 @@
           <a:p>
             <a:pPr algn="l">
               <a:lnSpc>
-                <a:spcPct val="130000"/>
+                <a:spcPct val="135000"/>
               </a:lnSpc>
+              <a:spcAft>
+                <a:spcPts val="600"/>
+              </a:spcAft>
             </a:pPr>
             <a:r>
               <a:rPr sz="1800">
@@ -3890,8 +3896,11 @@
           <a:p>
             <a:pPr algn="l">
               <a:lnSpc>
-                <a:spcPct val="130000"/>
+                <a:spcPct val="135000"/>
               </a:lnSpc>
+              <a:spcAft>
+                <a:spcPts val="600"/>
+              </a:spcAft>
             </a:pPr>
             <a:r>
               <a:rPr sz="1800">
@@ -3905,8 +3914,11 @@
           <a:p>
             <a:pPr algn="l">
               <a:lnSpc>
-                <a:spcPct val="130000"/>
+                <a:spcPct val="135000"/>
               </a:lnSpc>
+              <a:spcAft>
+                <a:spcPts val="600"/>
+              </a:spcAft>
             </a:pPr>
             <a:r>
               <a:rPr sz="1800">
@@ -3936,14 +3948,14 @@
           <a:noFill/>
         </p:spPr>
         <p:txBody>
-          <a:bodyPr wrap="square" lIns="45720" rIns="45720" tIns="18288" bIns="18288">
-            <a:spAutoFit/>
+          <a:bodyPr wrap="square" anchor="ctr" lIns="0" rIns="0" tIns="0" bIns="0">
+            <a:noAutofit/>
           </a:bodyPr>
           <a:lstStyle/>
           <a:p>
             <a:pPr algn="l"/>
             <a:r>
-              <a:rPr sz="1100" b="0">
+              <a:rPr sz="1100" b="0" i="1">
                 <a:solidFill>
                   <a:srgbClr val="808080"/>
                 </a:solidFill>
@@ -3979,8 +3991,8 @@
         </p:nvSpPr>
         <p:spPr>
           <a:xfrm>
-            <a:off x="457200" y="457200"/>
-            <a:ext cx="11277295" cy="822960"/>
+            <a:off x="457200" y="365760"/>
+            <a:ext cx="11277295" cy="914400"/>
           </a:xfrm>
           <a:prstGeom prst="rect">
             <a:avLst/>
@@ -3988,14 +4000,14 @@
           <a:noFill/>
         </p:spPr>
         <p:txBody>
-          <a:bodyPr wrap="square" lIns="45720" rIns="45720" tIns="18288" bIns="18288">
-            <a:spAutoFit/>
+          <a:bodyPr wrap="square" anchor="ctr" lIns="0" rIns="0" tIns="0" bIns="0">
+            <a:noAutofit/>
           </a:bodyPr>
           <a:lstStyle/>
           <a:p>
             <a:pPr algn="l"/>
             <a:r>
-              <a:rPr sz="3000" b="1">
+              <a:rPr sz="2800" b="1" i="0">
                 <a:solidFill>
                   <a:srgbClr val="1F4E78"/>
                 </a:solidFill>
@@ -4013,8 +4025,8 @@
         </p:nvSpPr>
         <p:spPr>
           <a:xfrm>
-            <a:off x="457200" y="1234440"/>
-            <a:ext cx="1828800" cy="36576"/>
+            <a:off x="457200" y="1298448"/>
+            <a:ext cx="2194560" cy="36576"/>
           </a:xfrm>
           <a:prstGeom prst="rect">
             <a:avLst/>
@@ -4056,8 +4068,8 @@
         </p:nvSpPr>
         <p:spPr>
           <a:xfrm>
-            <a:off x="457200" y="1463040"/>
-            <a:ext cx="11277295" cy="640080"/>
+            <a:off x="457200" y="1508760"/>
+            <a:ext cx="11277295" cy="502920"/>
           </a:xfrm>
           <a:prstGeom prst="rect">
             <a:avLst/>
@@ -4065,14 +4077,14 @@
           <a:noFill/>
         </p:spPr>
         <p:txBody>
-          <a:bodyPr wrap="square" lIns="45720" rIns="45720" tIns="18288" bIns="18288">
-            <a:spAutoFit/>
+          <a:bodyPr wrap="square" anchor="ctr" lIns="0" rIns="0" tIns="0" bIns="0">
+            <a:noAutofit/>
           </a:bodyPr>
           <a:lstStyle/>
           <a:p>
             <a:pPr algn="l"/>
             <a:r>
-              <a:rPr sz="2200" b="1">
+              <a:rPr sz="2000" b="1" i="0">
                 <a:solidFill>
                   <a:srgbClr val="C0392B"/>
                 </a:solidFill>
@@ -4090,8 +4102,8 @@
         </p:nvSpPr>
         <p:spPr>
           <a:xfrm>
-            <a:off x="640080" y="2286000"/>
-            <a:ext cx="10911535" cy="4069080"/>
+            <a:off x="640080" y="2148840"/>
+            <a:ext cx="10911535" cy="4114800"/>
           </a:xfrm>
           <a:prstGeom prst="rect">
             <a:avLst/>
@@ -4099,15 +4111,18 @@
           <a:noFill/>
         </p:spPr>
         <p:txBody>
-          <a:bodyPr wrap="square" lIns="45720" rIns="45720">
-            <a:spAutoFit/>
+          <a:bodyPr wrap="square" anchor="t" lIns="0" rIns="0" tIns="0" bIns="0">
+            <a:noAutofit/>
           </a:bodyPr>
           <a:lstStyle/>
           <a:p>
             <a:pPr algn="l">
               <a:lnSpc>
-                <a:spcPct val="130000"/>
+                <a:spcPct val="135000"/>
               </a:lnSpc>
+              <a:spcAft>
+                <a:spcPts val="600"/>
+              </a:spcAft>
             </a:pPr>
             <a:r>
               <a:rPr sz="1800">
@@ -4121,8 +4136,11 @@
           <a:p>
             <a:pPr algn="l">
               <a:lnSpc>
-                <a:spcPct val="130000"/>
+                <a:spcPct val="135000"/>
               </a:lnSpc>
+              <a:spcAft>
+                <a:spcPts val="600"/>
+              </a:spcAft>
             </a:pPr>
             <a:r>
               <a:rPr sz="1800">
@@ -4136,8 +4154,11 @@
           <a:p>
             <a:pPr algn="l">
               <a:lnSpc>
-                <a:spcPct val="130000"/>
+                <a:spcPct val="135000"/>
               </a:lnSpc>
+              <a:spcAft>
+                <a:spcPts val="600"/>
+              </a:spcAft>
             </a:pPr>
             <a:r>
               <a:rPr sz="1800">
@@ -4151,8 +4172,11 @@
           <a:p>
             <a:pPr algn="l">
               <a:lnSpc>
-                <a:spcPct val="130000"/>
+                <a:spcPct val="135000"/>
               </a:lnSpc>
+              <a:spcAft>
+                <a:spcPts val="600"/>
+              </a:spcAft>
             </a:pPr>
             <a:r>
               <a:rPr sz="1800">
@@ -4191,8 +4215,8 @@
         </p:nvSpPr>
         <p:spPr>
           <a:xfrm>
-            <a:off x="457200" y="457200"/>
-            <a:ext cx="11277295" cy="822960"/>
+            <a:off x="457200" y="365760"/>
+            <a:ext cx="11277295" cy="914400"/>
           </a:xfrm>
           <a:prstGeom prst="rect">
             <a:avLst/>
@@ -4200,14 +4224,14 @@
           <a:noFill/>
         </p:spPr>
         <p:txBody>
-          <a:bodyPr wrap="square" lIns="45720" rIns="45720" tIns="18288" bIns="18288">
-            <a:spAutoFit/>
+          <a:bodyPr wrap="square" anchor="ctr" lIns="0" rIns="0" tIns="0" bIns="0">
+            <a:noAutofit/>
           </a:bodyPr>
           <a:lstStyle/>
           <a:p>
             <a:pPr algn="l"/>
             <a:r>
-              <a:rPr sz="3000" b="1">
+              <a:rPr sz="2800" b="1" i="0">
                 <a:solidFill>
                   <a:srgbClr val="1F4E78"/>
                 </a:solidFill>
@@ -4225,8 +4249,8 @@
         </p:nvSpPr>
         <p:spPr>
           <a:xfrm>
-            <a:off x="457200" y="1234440"/>
-            <a:ext cx="1828800" cy="36576"/>
+            <a:off x="457200" y="1298448"/>
+            <a:ext cx="2194560" cy="36576"/>
           </a:xfrm>
           <a:prstGeom prst="rect">
             <a:avLst/>
@@ -4268,8 +4292,8 @@
         </p:nvSpPr>
         <p:spPr>
           <a:xfrm>
-            <a:off x="822960" y="1463040"/>
-            <a:ext cx="10545775" cy="4892040"/>
+            <a:off x="822960" y="2148840"/>
+            <a:ext cx="10545775" cy="4114800"/>
           </a:xfrm>
           <a:prstGeom prst="rect">
             <a:avLst/>
@@ -4277,15 +4301,18 @@
           <a:noFill/>
         </p:spPr>
         <p:txBody>
-          <a:bodyPr wrap="square" lIns="45720" rIns="45720">
-            <a:spAutoFit/>
+          <a:bodyPr wrap="square" anchor="t" lIns="0" rIns="0" tIns="0" bIns="0">
+            <a:noAutofit/>
           </a:bodyPr>
           <a:lstStyle/>
           <a:p>
             <a:pPr algn="l">
               <a:lnSpc>
-                <a:spcPct val="130000"/>
+                <a:spcPct val="135000"/>
               </a:lnSpc>
+              <a:spcAft>
+                <a:spcPts val="600"/>
+              </a:spcAft>
             </a:pPr>
             <a:r>
               <a:rPr sz="2200">
@@ -4376,14 +4403,14 @@
           <a:noFill/>
         </p:spPr>
         <p:txBody>
-          <a:bodyPr wrap="square" lIns="45720" rIns="45720" tIns="18288" bIns="18288">
-            <a:spAutoFit/>
+          <a:bodyPr wrap="square" anchor="ctr" lIns="0" rIns="0" tIns="0" bIns="0">
+            <a:noAutofit/>
           </a:bodyPr>
           <a:lstStyle/>
           <a:p>
             <a:pPr algn="ctr"/>
             <a:r>
-              <a:rPr sz="5800" b="1">
+              <a:rPr sz="5800" b="1" i="0">
                 <a:solidFill>
                   <a:srgbClr val="FFFFFF"/>
                 </a:solidFill>
@@ -4419,8 +4446,8 @@
         </p:nvSpPr>
         <p:spPr>
           <a:xfrm>
-            <a:off x="457200" y="457200"/>
-            <a:ext cx="11277295" cy="822960"/>
+            <a:off x="457200" y="365760"/>
+            <a:ext cx="11277295" cy="914400"/>
           </a:xfrm>
           <a:prstGeom prst="rect">
             <a:avLst/>
@@ -4428,14 +4455,14 @@
           <a:noFill/>
         </p:spPr>
         <p:txBody>
-          <a:bodyPr wrap="square" lIns="45720" rIns="45720" tIns="18288" bIns="18288">
-            <a:spAutoFit/>
+          <a:bodyPr wrap="square" anchor="ctr" lIns="0" rIns="0" tIns="0" bIns="0">
+            <a:noAutofit/>
           </a:bodyPr>
           <a:lstStyle/>
           <a:p>
             <a:pPr algn="l"/>
             <a:r>
-              <a:rPr sz="3000" b="1">
+              <a:rPr sz="2800" b="1" i="0">
                 <a:solidFill>
                   <a:srgbClr val="1F4E78"/>
                 </a:solidFill>
@@ -4453,8 +4480,8 @@
         </p:nvSpPr>
         <p:spPr>
           <a:xfrm>
-            <a:off x="457200" y="1234440"/>
-            <a:ext cx="1828800" cy="36576"/>
+            <a:off x="457200" y="1298448"/>
+            <a:ext cx="2194560" cy="36576"/>
           </a:xfrm>
           <a:prstGeom prst="rect">
             <a:avLst/>
@@ -4496,8 +4523,8 @@
         </p:nvSpPr>
         <p:spPr>
           <a:xfrm>
-            <a:off x="457200" y="1463040"/>
-            <a:ext cx="11277295" cy="640080"/>
+            <a:off x="457200" y="1508760"/>
+            <a:ext cx="11277295" cy="502920"/>
           </a:xfrm>
           <a:prstGeom prst="rect">
             <a:avLst/>
@@ -4505,14 +4532,14 @@
           <a:noFill/>
         </p:spPr>
         <p:txBody>
-          <a:bodyPr wrap="square" lIns="45720" rIns="45720" tIns="18288" bIns="18288">
-            <a:spAutoFit/>
+          <a:bodyPr wrap="square" anchor="ctr" lIns="0" rIns="0" tIns="0" bIns="0">
+            <a:noAutofit/>
           </a:bodyPr>
           <a:lstStyle/>
           <a:p>
             <a:pPr algn="l"/>
             <a:r>
-              <a:rPr sz="2200" b="1">
+              <a:rPr sz="2000" b="1" i="0">
                 <a:solidFill>
                   <a:srgbClr val="C0392B"/>
                 </a:solidFill>
@@ -4530,8 +4557,8 @@
         </p:nvSpPr>
         <p:spPr>
           <a:xfrm>
-            <a:off x="640080" y="2286000"/>
-            <a:ext cx="10911535" cy="4069080"/>
+            <a:off x="640080" y="2148840"/>
+            <a:ext cx="10911535" cy="4114800"/>
           </a:xfrm>
           <a:prstGeom prst="rect">
             <a:avLst/>
@@ -4539,15 +4566,18 @@
           <a:noFill/>
         </p:spPr>
         <p:txBody>
-          <a:bodyPr wrap="square" lIns="45720" rIns="45720">
-            <a:spAutoFit/>
+          <a:bodyPr wrap="square" anchor="t" lIns="0" rIns="0" tIns="0" bIns="0">
+            <a:noAutofit/>
           </a:bodyPr>
           <a:lstStyle/>
           <a:p>
             <a:pPr algn="l">
               <a:lnSpc>
-                <a:spcPct val="130000"/>
+                <a:spcPct val="135000"/>
               </a:lnSpc>
+              <a:spcAft>
+                <a:spcPts val="600"/>
+              </a:spcAft>
             </a:pPr>
             <a:r>
               <a:rPr sz="1800">
@@ -4561,8 +4591,11 @@
           <a:p>
             <a:pPr algn="l">
               <a:lnSpc>
-                <a:spcPct val="130000"/>
+                <a:spcPct val="135000"/>
               </a:lnSpc>
+              <a:spcAft>
+                <a:spcPts val="600"/>
+              </a:spcAft>
             </a:pPr>
             <a:r>
               <a:rPr sz="1800">
@@ -4576,8 +4609,11 @@
           <a:p>
             <a:pPr algn="l">
               <a:lnSpc>
-                <a:spcPct val="130000"/>
+                <a:spcPct val="135000"/>
               </a:lnSpc>
+              <a:spcAft>
+                <a:spcPts val="600"/>
+              </a:spcAft>
             </a:pPr>
             <a:r>
               <a:rPr sz="1800">
@@ -4591,8 +4627,11 @@
           <a:p>
             <a:pPr algn="l">
               <a:lnSpc>
-                <a:spcPct val="130000"/>
+                <a:spcPct val="135000"/>
               </a:lnSpc>
+              <a:spcAft>
+                <a:spcPts val="600"/>
+              </a:spcAft>
             </a:pPr>
             <a:r>
               <a:rPr sz="1800">
@@ -4631,8 +4670,8 @@
         </p:nvSpPr>
         <p:spPr>
           <a:xfrm>
-            <a:off x="457200" y="457200"/>
-            <a:ext cx="11277295" cy="822960"/>
+            <a:off x="457200" y="365760"/>
+            <a:ext cx="11277295" cy="914400"/>
           </a:xfrm>
           <a:prstGeom prst="rect">
             <a:avLst/>
@@ -4640,14 +4679,14 @@
           <a:noFill/>
         </p:spPr>
         <p:txBody>
-          <a:bodyPr wrap="square" lIns="45720" rIns="45720" tIns="18288" bIns="18288">
-            <a:spAutoFit/>
+          <a:bodyPr wrap="square" anchor="ctr" lIns="0" rIns="0" tIns="0" bIns="0">
+            <a:noAutofit/>
           </a:bodyPr>
           <a:lstStyle/>
           <a:p>
             <a:pPr algn="l"/>
             <a:r>
-              <a:rPr sz="3000" b="1">
+              <a:rPr sz="2800" b="1" i="0">
                 <a:solidFill>
                   <a:srgbClr val="1F4E78"/>
                 </a:solidFill>
@@ -4665,8 +4704,8 @@
         </p:nvSpPr>
         <p:spPr>
           <a:xfrm>
-            <a:off x="457200" y="1234440"/>
-            <a:ext cx="1828800" cy="36576"/>
+            <a:off x="457200" y="1298448"/>
+            <a:ext cx="2194560" cy="36576"/>
           </a:xfrm>
           <a:prstGeom prst="rect">
             <a:avLst/>
@@ -4708,8 +4747,8 @@
         </p:nvSpPr>
         <p:spPr>
           <a:xfrm>
-            <a:off x="457200" y="1463040"/>
-            <a:ext cx="11277295" cy="640080"/>
+            <a:off x="457200" y="1508760"/>
+            <a:ext cx="11277295" cy="502920"/>
           </a:xfrm>
           <a:prstGeom prst="rect">
             <a:avLst/>
@@ -4717,14 +4756,14 @@
           <a:noFill/>
         </p:spPr>
         <p:txBody>
-          <a:bodyPr wrap="square" lIns="45720" rIns="45720" tIns="18288" bIns="18288">
-            <a:spAutoFit/>
+          <a:bodyPr wrap="square" anchor="ctr" lIns="0" rIns="0" tIns="0" bIns="0">
+            <a:noAutofit/>
           </a:bodyPr>
           <a:lstStyle/>
           <a:p>
             <a:pPr algn="l"/>
             <a:r>
-              <a:rPr sz="2200" b="1">
+              <a:rPr sz="2000" b="1" i="0">
                 <a:solidFill>
                   <a:srgbClr val="C0392B"/>
                 </a:solidFill>
@@ -4742,8 +4781,8 @@
         </p:nvSpPr>
         <p:spPr>
           <a:xfrm>
-            <a:off x="640080" y="2286000"/>
-            <a:ext cx="10911535" cy="4069080"/>
+            <a:off x="640080" y="2148840"/>
+            <a:ext cx="10911535" cy="4114800"/>
           </a:xfrm>
           <a:prstGeom prst="rect">
             <a:avLst/>
@@ -4751,15 +4790,18 @@
           <a:noFill/>
         </p:spPr>
         <p:txBody>
-          <a:bodyPr wrap="square" lIns="45720" rIns="45720">
-            <a:spAutoFit/>
+          <a:bodyPr wrap="square" anchor="t" lIns="0" rIns="0" tIns="0" bIns="0">
+            <a:noAutofit/>
           </a:bodyPr>
           <a:lstStyle/>
           <a:p>
             <a:pPr algn="l">
               <a:lnSpc>
-                <a:spcPct val="130000"/>
+                <a:spcPct val="135000"/>
               </a:lnSpc>
+              <a:spcAft>
+                <a:spcPts val="600"/>
+              </a:spcAft>
             </a:pPr>
             <a:r>
               <a:rPr sz="1800">
@@ -4773,8 +4815,11 @@
           <a:p>
             <a:pPr algn="l">
               <a:lnSpc>
-                <a:spcPct val="130000"/>
+                <a:spcPct val="135000"/>
               </a:lnSpc>
+              <a:spcAft>
+                <a:spcPts val="600"/>
+              </a:spcAft>
             </a:pPr>
             <a:r>
               <a:rPr sz="1800">
@@ -4788,8 +4833,11 @@
           <a:p>
             <a:pPr algn="l">
               <a:lnSpc>
-                <a:spcPct val="130000"/>
+                <a:spcPct val="135000"/>
               </a:lnSpc>
+              <a:spcAft>
+                <a:spcPts val="600"/>
+              </a:spcAft>
             </a:pPr>
             <a:r>
               <a:rPr sz="1800">
@@ -4828,8 +4876,8 @@
         </p:nvSpPr>
         <p:spPr>
           <a:xfrm>
-            <a:off x="457200" y="457200"/>
-            <a:ext cx="11277295" cy="822960"/>
+            <a:off x="457200" y="365760"/>
+            <a:ext cx="11277295" cy="914400"/>
           </a:xfrm>
           <a:prstGeom prst="rect">
             <a:avLst/>
@@ -4837,14 +4885,14 @@
           <a:noFill/>
         </p:spPr>
         <p:txBody>
-          <a:bodyPr wrap="square" lIns="45720" rIns="45720" tIns="18288" bIns="18288">
-            <a:spAutoFit/>
+          <a:bodyPr wrap="square" anchor="ctr" lIns="0" rIns="0" tIns="0" bIns="0">
+            <a:noAutofit/>
           </a:bodyPr>
           <a:lstStyle/>
           <a:p>
             <a:pPr algn="l"/>
             <a:r>
-              <a:rPr sz="3000" b="1">
+              <a:rPr sz="2800" b="1" i="0">
                 <a:solidFill>
                   <a:srgbClr val="1F4E78"/>
                 </a:solidFill>
@@ -4862,8 +4910,8 @@
         </p:nvSpPr>
         <p:spPr>
           <a:xfrm>
-            <a:off x="457200" y="1234440"/>
-            <a:ext cx="1828800" cy="36576"/>
+            <a:off x="457200" y="1298448"/>
+            <a:ext cx="2194560" cy="36576"/>
           </a:xfrm>
           <a:prstGeom prst="rect">
             <a:avLst/>
@@ -4905,8 +4953,8 @@
         </p:nvSpPr>
         <p:spPr>
           <a:xfrm>
-            <a:off x="457200" y="1463040"/>
-            <a:ext cx="11277295" cy="640080"/>
+            <a:off x="457200" y="1508760"/>
+            <a:ext cx="11277295" cy="502920"/>
           </a:xfrm>
           <a:prstGeom prst="rect">
             <a:avLst/>
@@ -4914,14 +4962,14 @@
           <a:noFill/>
         </p:spPr>
         <p:txBody>
-          <a:bodyPr wrap="square" lIns="45720" rIns="45720" tIns="18288" bIns="18288">
-            <a:spAutoFit/>
+          <a:bodyPr wrap="square" anchor="ctr" lIns="0" rIns="0" tIns="0" bIns="0">
+            <a:noAutofit/>
           </a:bodyPr>
           <a:lstStyle/>
           <a:p>
             <a:pPr algn="l"/>
             <a:r>
-              <a:rPr sz="2200" b="1">
+              <a:rPr sz="2000" b="1" i="0">
                 <a:solidFill>
                   <a:srgbClr val="C0392B"/>
                 </a:solidFill>
@@ -4940,7 +4988,7 @@
           <p:nvPr/>
         </p:nvGraphicFramePr>
         <p:xfrm>
-          <a:off x="457200" y="2286000"/>
+          <a:off x="457200" y="2148840"/>
           <a:ext cx="11277295" cy="1371600"/>
         </p:xfrm>
         <a:graphic>
@@ -5112,14 +5160,14 @@
           <a:noFill/>
         </p:spPr>
         <p:txBody>
-          <a:bodyPr wrap="square" lIns="45720" rIns="45720" tIns="18288" bIns="18288">
-            <a:spAutoFit/>
+          <a:bodyPr wrap="square" anchor="ctr" lIns="0" rIns="0" tIns="0" bIns="0">
+            <a:noAutofit/>
           </a:bodyPr>
           <a:lstStyle/>
           <a:p>
             <a:pPr algn="l"/>
             <a:r>
-              <a:rPr sz="1100" b="0">
+              <a:rPr sz="1100" b="0" i="1">
                 <a:solidFill>
                   <a:srgbClr val="808080"/>
                 </a:solidFill>
@@ -5155,8 +5203,8 @@
         </p:nvSpPr>
         <p:spPr>
           <a:xfrm>
-            <a:off x="457200" y="457200"/>
-            <a:ext cx="11277295" cy="822960"/>
+            <a:off x="457200" y="365760"/>
+            <a:ext cx="11277295" cy="914400"/>
           </a:xfrm>
           <a:prstGeom prst="rect">
             <a:avLst/>
@@ -5164,14 +5212,14 @@
           <a:noFill/>
         </p:spPr>
         <p:txBody>
-          <a:bodyPr wrap="square" lIns="45720" rIns="45720" tIns="18288" bIns="18288">
-            <a:spAutoFit/>
+          <a:bodyPr wrap="square" anchor="ctr" lIns="0" rIns="0" tIns="0" bIns="0">
+            <a:noAutofit/>
           </a:bodyPr>
           <a:lstStyle/>
           <a:p>
             <a:pPr algn="l"/>
             <a:r>
-              <a:rPr sz="3000" b="1">
+              <a:rPr sz="2800" b="1" i="0">
                 <a:solidFill>
                   <a:srgbClr val="1F4E78"/>
                 </a:solidFill>
@@ -5189,8 +5237,8 @@
         </p:nvSpPr>
         <p:spPr>
           <a:xfrm>
-            <a:off x="457200" y="1234440"/>
-            <a:ext cx="1828800" cy="36576"/>
+            <a:off x="457200" y="1298448"/>
+            <a:ext cx="2194560" cy="36576"/>
           </a:xfrm>
           <a:prstGeom prst="rect">
             <a:avLst/>
@@ -5232,8 +5280,8 @@
         </p:nvSpPr>
         <p:spPr>
           <a:xfrm>
-            <a:off x="457200" y="1463040"/>
-            <a:ext cx="11277295" cy="640080"/>
+            <a:off x="457200" y="1508760"/>
+            <a:ext cx="11277295" cy="502920"/>
           </a:xfrm>
           <a:prstGeom prst="rect">
             <a:avLst/>
@@ -5241,14 +5289,14 @@
           <a:noFill/>
         </p:spPr>
         <p:txBody>
-          <a:bodyPr wrap="square" lIns="45720" rIns="45720" tIns="18288" bIns="18288">
-            <a:spAutoFit/>
+          <a:bodyPr wrap="square" anchor="ctr" lIns="0" rIns="0" tIns="0" bIns="0">
+            <a:noAutofit/>
           </a:bodyPr>
           <a:lstStyle/>
           <a:p>
             <a:pPr algn="l"/>
             <a:r>
-              <a:rPr sz="2200" b="1">
+              <a:rPr sz="2000" b="1" i="0">
                 <a:solidFill>
                   <a:srgbClr val="C0392B"/>
                 </a:solidFill>
@@ -5266,8 +5314,8 @@
         </p:nvSpPr>
         <p:spPr>
           <a:xfrm>
-            <a:off x="640080" y="2286000"/>
-            <a:ext cx="10911535" cy="4069080"/>
+            <a:off x="640080" y="2148840"/>
+            <a:ext cx="10911535" cy="4114800"/>
           </a:xfrm>
           <a:prstGeom prst="rect">
             <a:avLst/>
@@ -5275,15 +5323,18 @@
           <a:noFill/>
         </p:spPr>
         <p:txBody>
-          <a:bodyPr wrap="square" lIns="45720" rIns="45720">
-            <a:spAutoFit/>
+          <a:bodyPr wrap="square" anchor="t" lIns="0" rIns="0" tIns="0" bIns="0">
+            <a:noAutofit/>
           </a:bodyPr>
           <a:lstStyle/>
           <a:p>
             <a:pPr algn="l">
               <a:lnSpc>
-                <a:spcPct val="130000"/>
+                <a:spcPct val="135000"/>
               </a:lnSpc>
+              <a:spcAft>
+                <a:spcPts val="600"/>
+              </a:spcAft>
             </a:pPr>
             <a:r>
               <a:rPr sz="1800">
@@ -5297,8 +5348,11 @@
           <a:p>
             <a:pPr algn="l">
               <a:lnSpc>
-                <a:spcPct val="130000"/>
+                <a:spcPct val="135000"/>
               </a:lnSpc>
+              <a:spcAft>
+                <a:spcPts val="600"/>
+              </a:spcAft>
             </a:pPr>
             <a:r>
               <a:rPr sz="1800">
@@ -5312,8 +5366,11 @@
           <a:p>
             <a:pPr algn="l">
               <a:lnSpc>
-                <a:spcPct val="130000"/>
+                <a:spcPct val="135000"/>
               </a:lnSpc>
+              <a:spcAft>
+                <a:spcPts val="600"/>
+              </a:spcAft>
             </a:pPr>
             <a:r>
               <a:rPr sz="1800">
@@ -5352,8 +5409,8 @@
         </p:nvSpPr>
         <p:spPr>
           <a:xfrm>
-            <a:off x="457200" y="457200"/>
-            <a:ext cx="11277295" cy="822960"/>
+            <a:off x="457200" y="365760"/>
+            <a:ext cx="11277295" cy="914400"/>
           </a:xfrm>
           <a:prstGeom prst="rect">
             <a:avLst/>
@@ -5361,14 +5418,14 @@
           <a:noFill/>
         </p:spPr>
         <p:txBody>
-          <a:bodyPr wrap="square" lIns="45720" rIns="45720" tIns="18288" bIns="18288">
-            <a:spAutoFit/>
+          <a:bodyPr wrap="square" anchor="ctr" lIns="0" rIns="0" tIns="0" bIns="0">
+            <a:noAutofit/>
           </a:bodyPr>
           <a:lstStyle/>
           <a:p>
             <a:pPr algn="l"/>
             <a:r>
-              <a:rPr sz="3000" b="1">
+              <a:rPr sz="2800" b="1" i="0">
                 <a:solidFill>
                   <a:srgbClr val="1F4E78"/>
                 </a:solidFill>
@@ -5386,8 +5443,8 @@
         </p:nvSpPr>
         <p:spPr>
           <a:xfrm>
-            <a:off x="457200" y="1234440"/>
-            <a:ext cx="1828800" cy="36576"/>
+            <a:off x="457200" y="1298448"/>
+            <a:ext cx="2194560" cy="36576"/>
           </a:xfrm>
           <a:prstGeom prst="rect">
             <a:avLst/>
@@ -5429,8 +5486,8 @@
         </p:nvSpPr>
         <p:spPr>
           <a:xfrm>
-            <a:off x="822960" y="1463040"/>
-            <a:ext cx="10545775" cy="4892040"/>
+            <a:off x="822960" y="2148840"/>
+            <a:ext cx="10545775" cy="4114800"/>
           </a:xfrm>
           <a:prstGeom prst="rect">
             <a:avLst/>
@@ -5438,15 +5495,18 @@
           <a:noFill/>
         </p:spPr>
         <p:txBody>
-          <a:bodyPr wrap="square" lIns="45720" rIns="45720">
-            <a:spAutoFit/>
+          <a:bodyPr wrap="square" anchor="t" lIns="0" rIns="0" tIns="0" bIns="0">
+            <a:noAutofit/>
           </a:bodyPr>
           <a:lstStyle/>
           <a:p>
             <a:pPr algn="l">
               <a:lnSpc>
-                <a:spcPct val="130000"/>
+                <a:spcPct val="135000"/>
               </a:lnSpc>
+              <a:spcAft>
+                <a:spcPts val="600"/>
+              </a:spcAft>
             </a:pPr>
             <a:r>
               <a:rPr sz="2200">
@@ -5485,8 +5545,8 @@
         </p:nvSpPr>
         <p:spPr>
           <a:xfrm>
-            <a:off x="457200" y="457200"/>
-            <a:ext cx="11277295" cy="822960"/>
+            <a:off x="457200" y="365760"/>
+            <a:ext cx="11277295" cy="914400"/>
           </a:xfrm>
           <a:prstGeom prst="rect">
             <a:avLst/>
@@ -5494,14 +5554,14 @@
           <a:noFill/>
         </p:spPr>
         <p:txBody>
-          <a:bodyPr wrap="square" lIns="45720" rIns="45720" tIns="18288" bIns="18288">
-            <a:spAutoFit/>
+          <a:bodyPr wrap="square" anchor="ctr" lIns="0" rIns="0" tIns="0" bIns="0">
+            <a:noAutofit/>
           </a:bodyPr>
           <a:lstStyle/>
           <a:p>
             <a:pPr algn="l"/>
             <a:r>
-              <a:rPr sz="3000" b="1">
+              <a:rPr sz="2800" b="1" i="0">
                 <a:solidFill>
                   <a:srgbClr val="1F4E78"/>
                 </a:solidFill>
@@ -5519,8 +5579,8 @@
         </p:nvSpPr>
         <p:spPr>
           <a:xfrm>
-            <a:off x="457200" y="1234440"/>
-            <a:ext cx="1828800" cy="36576"/>
+            <a:off x="457200" y="1298448"/>
+            <a:ext cx="2194560" cy="36576"/>
           </a:xfrm>
           <a:prstGeom prst="rect">
             <a:avLst/>
@@ -5562,8 +5622,8 @@
         </p:nvSpPr>
         <p:spPr>
           <a:xfrm>
-            <a:off x="457200" y="1463040"/>
-            <a:ext cx="11277295" cy="640080"/>
+            <a:off x="457200" y="1508760"/>
+            <a:ext cx="11277295" cy="502920"/>
           </a:xfrm>
           <a:prstGeom prst="rect">
             <a:avLst/>
@@ -5571,14 +5631,14 @@
           <a:noFill/>
         </p:spPr>
         <p:txBody>
-          <a:bodyPr wrap="square" lIns="45720" rIns="45720" tIns="18288" bIns="18288">
-            <a:spAutoFit/>
+          <a:bodyPr wrap="square" anchor="ctr" lIns="0" rIns="0" tIns="0" bIns="0">
+            <a:noAutofit/>
           </a:bodyPr>
           <a:lstStyle/>
           <a:p>
             <a:pPr algn="l"/>
             <a:r>
-              <a:rPr sz="2200" b="1">
+              <a:rPr sz="2000" b="1" i="0">
                 <a:solidFill>
                   <a:srgbClr val="C0392B"/>
                 </a:solidFill>
@@ -5596,8 +5656,8 @@
         </p:nvSpPr>
         <p:spPr>
           <a:xfrm>
-            <a:off x="640080" y="2286000"/>
-            <a:ext cx="10911535" cy="4069080"/>
+            <a:off x="640080" y="2148840"/>
+            <a:ext cx="10911535" cy="4114800"/>
           </a:xfrm>
           <a:prstGeom prst="rect">
             <a:avLst/>
@@ -5605,15 +5665,18 @@
           <a:noFill/>
         </p:spPr>
         <p:txBody>
-          <a:bodyPr wrap="square" lIns="45720" rIns="45720">
-            <a:spAutoFit/>
+          <a:bodyPr wrap="square" anchor="t" lIns="0" rIns="0" tIns="0" bIns="0">
+            <a:noAutofit/>
           </a:bodyPr>
           <a:lstStyle/>
           <a:p>
             <a:pPr algn="l">
               <a:lnSpc>
-                <a:spcPct val="130000"/>
+                <a:spcPct val="135000"/>
               </a:lnSpc>
+              <a:spcAft>
+                <a:spcPts val="600"/>
+              </a:spcAft>
             </a:pPr>
             <a:r>
               <a:rPr sz="1800">
@@ -5627,8 +5690,11 @@
           <a:p>
             <a:pPr algn="l">
               <a:lnSpc>
-                <a:spcPct val="130000"/>
+                <a:spcPct val="135000"/>
               </a:lnSpc>
+              <a:spcAft>
+                <a:spcPts val="600"/>
+              </a:spcAft>
             </a:pPr>
             <a:r>
               <a:rPr sz="1800">
@@ -5642,8 +5708,11 @@
           <a:p>
             <a:pPr algn="l">
               <a:lnSpc>
-                <a:spcPct val="130000"/>
+                <a:spcPct val="135000"/>
               </a:lnSpc>
+              <a:spcAft>
+                <a:spcPts val="600"/>
+              </a:spcAft>
             </a:pPr>
             <a:r>
               <a:rPr sz="1800">
@@ -5657,8 +5726,11 @@
           <a:p>
             <a:pPr algn="l">
               <a:lnSpc>
-                <a:spcPct val="130000"/>
+                <a:spcPct val="135000"/>
               </a:lnSpc>
+              <a:spcAft>
+                <a:spcPts val="600"/>
+              </a:spcAft>
             </a:pPr>
             <a:r>
               <a:rPr sz="1800">
@@ -5672,8 +5744,11 @@
           <a:p>
             <a:pPr algn="l">
               <a:lnSpc>
-                <a:spcPct val="130000"/>
+                <a:spcPct val="135000"/>
               </a:lnSpc>
+              <a:spcAft>
+                <a:spcPts val="600"/>
+              </a:spcAft>
             </a:pPr>
             <a:r>
               <a:rPr sz="1800">
@@ -5703,14 +5778,14 @@
           <a:noFill/>
         </p:spPr>
         <p:txBody>
-          <a:bodyPr wrap="square" lIns="45720" rIns="45720" tIns="18288" bIns="18288">
-            <a:spAutoFit/>
+          <a:bodyPr wrap="square" anchor="ctr" lIns="0" rIns="0" tIns="0" bIns="0">
+            <a:noAutofit/>
           </a:bodyPr>
           <a:lstStyle/>
           <a:p>
             <a:pPr algn="l"/>
             <a:r>
-              <a:rPr sz="1100" b="0">
+              <a:rPr sz="1100" b="0" i="1">
                 <a:solidFill>
                   <a:srgbClr val="808080"/>
                 </a:solidFill>
@@ -5798,14 +5873,14 @@
           <a:noFill/>
         </p:spPr>
         <p:txBody>
-          <a:bodyPr wrap="square" lIns="45720" rIns="45720" tIns="18288" bIns="18288">
-            <a:spAutoFit/>
+          <a:bodyPr wrap="square" anchor="ctr" lIns="0" rIns="0" tIns="0" bIns="0">
+            <a:noAutofit/>
           </a:bodyPr>
           <a:lstStyle/>
           <a:p>
             <a:pPr algn="ctr"/>
             <a:r>
-              <a:rPr sz="5800" b="1">
+              <a:rPr sz="5800" b="1" i="0">
                 <a:solidFill>
                   <a:srgbClr val="FFFFFF"/>
                 </a:solidFill>
@@ -5841,8 +5916,8 @@
         </p:nvSpPr>
         <p:spPr>
           <a:xfrm>
-            <a:off x="457200" y="457200"/>
-            <a:ext cx="11277295" cy="822960"/>
+            <a:off x="457200" y="365760"/>
+            <a:ext cx="11277295" cy="914400"/>
           </a:xfrm>
           <a:prstGeom prst="rect">
             <a:avLst/>
@@ -5850,14 +5925,14 @@
           <a:noFill/>
         </p:spPr>
         <p:txBody>
-          <a:bodyPr wrap="square" lIns="45720" rIns="45720" tIns="18288" bIns="18288">
-            <a:spAutoFit/>
+          <a:bodyPr wrap="square" anchor="ctr" lIns="0" rIns="0" tIns="0" bIns="0">
+            <a:noAutofit/>
           </a:bodyPr>
           <a:lstStyle/>
           <a:p>
             <a:pPr algn="l"/>
             <a:r>
-              <a:rPr sz="3000" b="1">
+              <a:rPr sz="2800" b="1" i="0">
                 <a:solidFill>
                   <a:srgbClr val="1F4E78"/>
                 </a:solidFill>
@@ -5875,8 +5950,8 @@
         </p:nvSpPr>
         <p:spPr>
           <a:xfrm>
-            <a:off x="457200" y="1234440"/>
-            <a:ext cx="1828800" cy="36576"/>
+            <a:off x="457200" y="1298448"/>
+            <a:ext cx="2194560" cy="36576"/>
           </a:xfrm>
           <a:prstGeom prst="rect">
             <a:avLst/>
@@ -5918,8 +5993,8 @@
         </p:nvSpPr>
         <p:spPr>
           <a:xfrm>
-            <a:off x="457200" y="1463040"/>
-            <a:ext cx="11277295" cy="640080"/>
+            <a:off x="457200" y="1508760"/>
+            <a:ext cx="11277295" cy="502920"/>
           </a:xfrm>
           <a:prstGeom prst="rect">
             <a:avLst/>
@@ -5927,14 +6002,14 @@
           <a:noFill/>
         </p:spPr>
         <p:txBody>
-          <a:bodyPr wrap="square" lIns="45720" rIns="45720" tIns="18288" bIns="18288">
-            <a:spAutoFit/>
+          <a:bodyPr wrap="square" anchor="ctr" lIns="0" rIns="0" tIns="0" bIns="0">
+            <a:noAutofit/>
           </a:bodyPr>
           <a:lstStyle/>
           <a:p>
             <a:pPr algn="l"/>
             <a:r>
-              <a:rPr sz="2200" b="1">
+              <a:rPr sz="2000" b="1" i="0">
                 <a:solidFill>
                   <a:srgbClr val="C0392B"/>
                 </a:solidFill>
@@ -5952,8 +6027,8 @@
         </p:nvSpPr>
         <p:spPr>
           <a:xfrm>
-            <a:off x="640080" y="2286000"/>
-            <a:ext cx="10911535" cy="4069080"/>
+            <a:off x="640080" y="2148840"/>
+            <a:ext cx="10911535" cy="4114800"/>
           </a:xfrm>
           <a:prstGeom prst="rect">
             <a:avLst/>
@@ -5961,15 +6036,18 @@
           <a:noFill/>
         </p:spPr>
         <p:txBody>
-          <a:bodyPr wrap="square" lIns="45720" rIns="45720">
-            <a:spAutoFit/>
+          <a:bodyPr wrap="square" anchor="t" lIns="0" rIns="0" tIns="0" bIns="0">
+            <a:noAutofit/>
           </a:bodyPr>
           <a:lstStyle/>
           <a:p>
             <a:pPr algn="l">
               <a:lnSpc>
-                <a:spcPct val="130000"/>
+                <a:spcPct val="135000"/>
               </a:lnSpc>
+              <a:spcAft>
+                <a:spcPts val="600"/>
+              </a:spcAft>
             </a:pPr>
             <a:r>
               <a:rPr sz="1800">
@@ -5983,8 +6061,11 @@
           <a:p>
             <a:pPr algn="l">
               <a:lnSpc>
-                <a:spcPct val="130000"/>
+                <a:spcPct val="135000"/>
               </a:lnSpc>
+              <a:spcAft>
+                <a:spcPts val="600"/>
+              </a:spcAft>
             </a:pPr>
             <a:r>
               <a:rPr sz="1800">
@@ -5998,8 +6079,11 @@
           <a:p>
             <a:pPr algn="l">
               <a:lnSpc>
-                <a:spcPct val="130000"/>
+                <a:spcPct val="135000"/>
               </a:lnSpc>
+              <a:spcAft>
+                <a:spcPts val="600"/>
+              </a:spcAft>
             </a:pPr>
             <a:r>
               <a:rPr sz="1800">
@@ -6013,8 +6097,11 @@
           <a:p>
             <a:pPr algn="l">
               <a:lnSpc>
-                <a:spcPct val="130000"/>
+                <a:spcPct val="135000"/>
               </a:lnSpc>
+              <a:spcAft>
+                <a:spcPts val="600"/>
+              </a:spcAft>
             </a:pPr>
             <a:r>
               <a:rPr sz="1800">
@@ -6028,8 +6115,11 @@
           <a:p>
             <a:pPr algn="l">
               <a:lnSpc>
-                <a:spcPct val="130000"/>
+                <a:spcPct val="135000"/>
               </a:lnSpc>
+              <a:spcAft>
+                <a:spcPts val="600"/>
+              </a:spcAft>
             </a:pPr>
             <a:r>
               <a:rPr sz="1800">
@@ -6068,8 +6158,8 @@
         </p:nvSpPr>
         <p:spPr>
           <a:xfrm>
-            <a:off x="457200" y="457200"/>
-            <a:ext cx="11277295" cy="822960"/>
+            <a:off x="457200" y="365760"/>
+            <a:ext cx="11277295" cy="914400"/>
           </a:xfrm>
           <a:prstGeom prst="rect">
             <a:avLst/>
@@ -6077,14 +6167,14 @@
           <a:noFill/>
         </p:spPr>
         <p:txBody>
-          <a:bodyPr wrap="square" lIns="45720" rIns="45720" tIns="18288" bIns="18288">
-            <a:spAutoFit/>
+          <a:bodyPr wrap="square" anchor="ctr" lIns="0" rIns="0" tIns="0" bIns="0">
+            <a:noAutofit/>
           </a:bodyPr>
           <a:lstStyle/>
           <a:p>
             <a:pPr algn="l"/>
             <a:r>
-              <a:rPr sz="3000" b="1">
+              <a:rPr sz="2800" b="1" i="0">
                 <a:solidFill>
                   <a:srgbClr val="1F4E78"/>
                 </a:solidFill>
@@ -6102,8 +6192,8 @@
         </p:nvSpPr>
         <p:spPr>
           <a:xfrm>
-            <a:off x="457200" y="1234440"/>
-            <a:ext cx="1828800" cy="36576"/>
+            <a:off x="457200" y="1298448"/>
+            <a:ext cx="2194560" cy="36576"/>
           </a:xfrm>
           <a:prstGeom prst="rect">
             <a:avLst/>
@@ -6145,8 +6235,8 @@
         </p:nvSpPr>
         <p:spPr>
           <a:xfrm>
-            <a:off x="457200" y="1463040"/>
-            <a:ext cx="11277295" cy="640080"/>
+            <a:off x="457200" y="1508760"/>
+            <a:ext cx="11277295" cy="502920"/>
           </a:xfrm>
           <a:prstGeom prst="rect">
             <a:avLst/>
@@ -6154,14 +6244,14 @@
           <a:noFill/>
         </p:spPr>
         <p:txBody>
-          <a:bodyPr wrap="square" lIns="45720" rIns="45720" tIns="18288" bIns="18288">
-            <a:spAutoFit/>
+          <a:bodyPr wrap="square" anchor="ctr" lIns="0" rIns="0" tIns="0" bIns="0">
+            <a:noAutofit/>
           </a:bodyPr>
           <a:lstStyle/>
           <a:p>
             <a:pPr algn="l"/>
             <a:r>
-              <a:rPr sz="2200" b="1">
+              <a:rPr sz="2000" b="1" i="0">
                 <a:solidFill>
                   <a:srgbClr val="C0392B"/>
                 </a:solidFill>
@@ -6179,8 +6269,8 @@
         </p:nvSpPr>
         <p:spPr>
           <a:xfrm>
-            <a:off x="640080" y="2286000"/>
-            <a:ext cx="10911535" cy="4069080"/>
+            <a:off x="640080" y="2148840"/>
+            <a:ext cx="10911535" cy="4114800"/>
           </a:xfrm>
           <a:prstGeom prst="rect">
             <a:avLst/>
@@ -6188,15 +6278,18 @@
           <a:noFill/>
         </p:spPr>
         <p:txBody>
-          <a:bodyPr wrap="square" lIns="45720" rIns="45720">
-            <a:spAutoFit/>
+          <a:bodyPr wrap="square" anchor="t" lIns="0" rIns="0" tIns="0" bIns="0">
+            <a:noAutofit/>
           </a:bodyPr>
           <a:lstStyle/>
           <a:p>
             <a:pPr algn="l">
               <a:lnSpc>
-                <a:spcPct val="130000"/>
+                <a:spcPct val="135000"/>
               </a:lnSpc>
+              <a:spcAft>
+                <a:spcPts val="600"/>
+              </a:spcAft>
             </a:pPr>
             <a:r>
               <a:rPr sz="1800">
@@ -6210,8 +6303,11 @@
           <a:p>
             <a:pPr algn="l">
               <a:lnSpc>
-                <a:spcPct val="130000"/>
+                <a:spcPct val="135000"/>
               </a:lnSpc>
+              <a:spcAft>
+                <a:spcPts val="600"/>
+              </a:spcAft>
             </a:pPr>
             <a:r>
               <a:rPr sz="1800">
@@ -6225,8 +6321,11 @@
           <a:p>
             <a:pPr algn="l">
               <a:lnSpc>
-                <a:spcPct val="130000"/>
+                <a:spcPct val="135000"/>
               </a:lnSpc>
+              <a:spcAft>
+                <a:spcPts val="600"/>
+              </a:spcAft>
             </a:pPr>
             <a:r>
               <a:rPr sz="1800">
@@ -6240,8 +6339,11 @@
           <a:p>
             <a:pPr algn="l">
               <a:lnSpc>
-                <a:spcPct val="130000"/>
+                <a:spcPct val="135000"/>
               </a:lnSpc>
+              <a:spcAft>
+                <a:spcPts val="600"/>
+              </a:spcAft>
             </a:pPr>
             <a:r>
               <a:rPr sz="1800">
@@ -6280,8 +6382,8 @@
         </p:nvSpPr>
         <p:spPr>
           <a:xfrm>
-            <a:off x="457200" y="457200"/>
-            <a:ext cx="11277295" cy="822960"/>
+            <a:off x="457200" y="365760"/>
+            <a:ext cx="11277295" cy="914400"/>
           </a:xfrm>
           <a:prstGeom prst="rect">
             <a:avLst/>
@@ -6289,14 +6391,14 @@
           <a:noFill/>
         </p:spPr>
         <p:txBody>
-          <a:bodyPr wrap="square" lIns="45720" rIns="45720" tIns="18288" bIns="18288">
-            <a:spAutoFit/>
+          <a:bodyPr wrap="square" anchor="ctr" lIns="0" rIns="0" tIns="0" bIns="0">
+            <a:noAutofit/>
           </a:bodyPr>
           <a:lstStyle/>
           <a:p>
             <a:pPr algn="l"/>
             <a:r>
-              <a:rPr sz="3000" b="1">
+              <a:rPr sz="2800" b="1" i="0">
                 <a:solidFill>
                   <a:srgbClr val="1F4E78"/>
                 </a:solidFill>
@@ -6314,8 +6416,8 @@
         </p:nvSpPr>
         <p:spPr>
           <a:xfrm>
-            <a:off x="457200" y="1234440"/>
-            <a:ext cx="1828800" cy="36576"/>
+            <a:off x="457200" y="1298448"/>
+            <a:ext cx="2194560" cy="36576"/>
           </a:xfrm>
           <a:prstGeom prst="rect">
             <a:avLst/>
@@ -6357,8 +6459,8 @@
         </p:nvSpPr>
         <p:spPr>
           <a:xfrm>
-            <a:off x="457200" y="1463040"/>
-            <a:ext cx="11277295" cy="640080"/>
+            <a:off x="457200" y="1508760"/>
+            <a:ext cx="11277295" cy="502920"/>
           </a:xfrm>
           <a:prstGeom prst="rect">
             <a:avLst/>
@@ -6366,14 +6468,14 @@
           <a:noFill/>
         </p:spPr>
         <p:txBody>
-          <a:bodyPr wrap="square" lIns="45720" rIns="45720" tIns="18288" bIns="18288">
-            <a:spAutoFit/>
+          <a:bodyPr wrap="square" anchor="ctr" lIns="0" rIns="0" tIns="0" bIns="0">
+            <a:noAutofit/>
           </a:bodyPr>
           <a:lstStyle/>
           <a:p>
             <a:pPr algn="l"/>
             <a:r>
-              <a:rPr sz="2200" b="1">
+              <a:rPr sz="2000" b="1" i="0">
                 <a:solidFill>
                   <a:srgbClr val="C0392B"/>
                 </a:solidFill>
@@ -6391,8 +6493,8 @@
         </p:nvSpPr>
         <p:spPr>
           <a:xfrm>
-            <a:off x="640080" y="2286000"/>
-            <a:ext cx="10911535" cy="4069080"/>
+            <a:off x="640080" y="2148840"/>
+            <a:ext cx="10911535" cy="4114800"/>
           </a:xfrm>
           <a:prstGeom prst="rect">
             <a:avLst/>
@@ -6400,15 +6502,18 @@
           <a:noFill/>
         </p:spPr>
         <p:txBody>
-          <a:bodyPr wrap="square" lIns="45720" rIns="45720">
-            <a:spAutoFit/>
+          <a:bodyPr wrap="square" anchor="t" lIns="0" rIns="0" tIns="0" bIns="0">
+            <a:noAutofit/>
           </a:bodyPr>
           <a:lstStyle/>
           <a:p>
             <a:pPr algn="l">
               <a:lnSpc>
-                <a:spcPct val="130000"/>
+                <a:spcPct val="135000"/>
               </a:lnSpc>
+              <a:spcAft>
+                <a:spcPts val="600"/>
+              </a:spcAft>
             </a:pPr>
             <a:r>
               <a:rPr sz="1800">
@@ -6422,8 +6527,11 @@
           <a:p>
             <a:pPr algn="l">
               <a:lnSpc>
-                <a:spcPct val="130000"/>
+                <a:spcPct val="135000"/>
               </a:lnSpc>
+              <a:spcAft>
+                <a:spcPts val="600"/>
+              </a:spcAft>
             </a:pPr>
             <a:r>
               <a:rPr sz="1800">
@@ -6437,8 +6545,11 @@
           <a:p>
             <a:pPr algn="l">
               <a:lnSpc>
-                <a:spcPct val="130000"/>
+                <a:spcPct val="135000"/>
               </a:lnSpc>
+              <a:spcAft>
+                <a:spcPts val="600"/>
+              </a:spcAft>
             </a:pPr>
             <a:r>
               <a:rPr sz="1800">
@@ -6468,14 +6579,14 @@
           <a:noFill/>
         </p:spPr>
         <p:txBody>
-          <a:bodyPr wrap="square" lIns="45720" rIns="45720" tIns="18288" bIns="18288">
-            <a:spAutoFit/>
+          <a:bodyPr wrap="square" anchor="ctr" lIns="0" rIns="0" tIns="0" bIns="0">
+            <a:noAutofit/>
           </a:bodyPr>
           <a:lstStyle/>
           <a:p>
             <a:pPr algn="l"/>
             <a:r>
-              <a:rPr sz="1100" b="0">
+              <a:rPr sz="1100" b="0" i="1">
                 <a:solidFill>
                   <a:srgbClr val="808080"/>
                 </a:solidFill>
@@ -6511,8 +6622,8 @@
         </p:nvSpPr>
         <p:spPr>
           <a:xfrm>
-            <a:off x="457200" y="457200"/>
-            <a:ext cx="11277295" cy="822960"/>
+            <a:off x="457200" y="365760"/>
+            <a:ext cx="11277295" cy="914400"/>
           </a:xfrm>
           <a:prstGeom prst="rect">
             <a:avLst/>
@@ -6520,14 +6631,14 @@
           <a:noFill/>
         </p:spPr>
         <p:txBody>
-          <a:bodyPr wrap="square" lIns="45720" rIns="45720" tIns="18288" bIns="18288">
-            <a:spAutoFit/>
+          <a:bodyPr wrap="square" anchor="ctr" lIns="0" rIns="0" tIns="0" bIns="0">
+            <a:noAutofit/>
           </a:bodyPr>
           <a:lstStyle/>
           <a:p>
             <a:pPr algn="l"/>
             <a:r>
-              <a:rPr sz="3000" b="1">
+              <a:rPr sz="2800" b="1" i="0">
                 <a:solidFill>
                   <a:srgbClr val="1F4E78"/>
                 </a:solidFill>
@@ -6545,8 +6656,8 @@
         </p:nvSpPr>
         <p:spPr>
           <a:xfrm>
-            <a:off x="457200" y="1234440"/>
-            <a:ext cx="1828800" cy="36576"/>
+            <a:off x="457200" y="1298448"/>
+            <a:ext cx="2194560" cy="36576"/>
           </a:xfrm>
           <a:prstGeom prst="rect">
             <a:avLst/>
@@ -6588,8 +6699,8 @@
         </p:nvSpPr>
         <p:spPr>
           <a:xfrm>
-            <a:off x="822960" y="1463040"/>
-            <a:ext cx="10545775" cy="4892040"/>
+            <a:off x="822960" y="2148840"/>
+            <a:ext cx="10545775" cy="4114800"/>
           </a:xfrm>
           <a:prstGeom prst="rect">
             <a:avLst/>
@@ -6597,15 +6708,18 @@
           <a:noFill/>
         </p:spPr>
         <p:txBody>
-          <a:bodyPr wrap="square" lIns="45720" rIns="45720">
-            <a:spAutoFit/>
+          <a:bodyPr wrap="square" anchor="t" lIns="0" rIns="0" tIns="0" bIns="0">
+            <a:noAutofit/>
           </a:bodyPr>
           <a:lstStyle/>
           <a:p>
             <a:pPr algn="l">
               <a:lnSpc>
-                <a:spcPct val="130000"/>
+                <a:spcPct val="135000"/>
               </a:lnSpc>
+              <a:spcAft>
+                <a:spcPts val="600"/>
+              </a:spcAft>
             </a:pPr>
             <a:r>
               <a:rPr sz="2200">
@@ -6696,14 +6810,14 @@
           <a:noFill/>
         </p:spPr>
         <p:txBody>
-          <a:bodyPr wrap="square" lIns="45720" rIns="45720" tIns="18288" bIns="18288">
-            <a:spAutoFit/>
+          <a:bodyPr wrap="square" anchor="ctr" lIns="0" rIns="0" tIns="0" bIns="0">
+            <a:noAutofit/>
           </a:bodyPr>
           <a:lstStyle/>
           <a:p>
             <a:pPr algn="ctr"/>
             <a:r>
-              <a:rPr sz="5800" b="1">
+              <a:rPr sz="5800" b="1" i="0">
                 <a:solidFill>
                   <a:srgbClr val="FFFFFF"/>
                 </a:solidFill>
@@ -6739,8 +6853,8 @@
         </p:nvSpPr>
         <p:spPr>
           <a:xfrm>
-            <a:off x="457200" y="457200"/>
-            <a:ext cx="11277295" cy="822960"/>
+            <a:off x="457200" y="365760"/>
+            <a:ext cx="11277295" cy="914400"/>
           </a:xfrm>
           <a:prstGeom prst="rect">
             <a:avLst/>
@@ -6748,14 +6862,14 @@
           <a:noFill/>
         </p:spPr>
         <p:txBody>
-          <a:bodyPr wrap="square" lIns="45720" rIns="45720" tIns="18288" bIns="18288">
-            <a:spAutoFit/>
+          <a:bodyPr wrap="square" anchor="ctr" lIns="0" rIns="0" tIns="0" bIns="0">
+            <a:noAutofit/>
           </a:bodyPr>
           <a:lstStyle/>
           <a:p>
             <a:pPr algn="l"/>
             <a:r>
-              <a:rPr sz="3000" b="1">
+              <a:rPr sz="2800" b="1" i="0">
                 <a:solidFill>
                   <a:srgbClr val="1F4E78"/>
                 </a:solidFill>
@@ -6773,8 +6887,8 @@
         </p:nvSpPr>
         <p:spPr>
           <a:xfrm>
-            <a:off x="457200" y="1234440"/>
-            <a:ext cx="1828800" cy="36576"/>
+            <a:off x="457200" y="1298448"/>
+            <a:ext cx="2194560" cy="36576"/>
           </a:xfrm>
           <a:prstGeom prst="rect">
             <a:avLst/>
@@ -6816,8 +6930,8 @@
         </p:nvSpPr>
         <p:spPr>
           <a:xfrm>
-            <a:off x="457200" y="1463040"/>
-            <a:ext cx="11277295" cy="640080"/>
+            <a:off x="457200" y="1508760"/>
+            <a:ext cx="11277295" cy="502920"/>
           </a:xfrm>
           <a:prstGeom prst="rect">
             <a:avLst/>
@@ -6825,14 +6939,14 @@
           <a:noFill/>
         </p:spPr>
         <p:txBody>
-          <a:bodyPr wrap="square" lIns="45720" rIns="45720" tIns="18288" bIns="18288">
-            <a:spAutoFit/>
+          <a:bodyPr wrap="square" anchor="ctr" lIns="0" rIns="0" tIns="0" bIns="0">
+            <a:noAutofit/>
           </a:bodyPr>
           <a:lstStyle/>
           <a:p>
             <a:pPr algn="l"/>
             <a:r>
-              <a:rPr sz="2200" b="1">
+              <a:rPr sz="2000" b="1" i="0">
                 <a:solidFill>
                   <a:srgbClr val="C0392B"/>
                 </a:solidFill>
@@ -6851,7 +6965,7 @@
           <p:nvPr/>
         </p:nvGraphicFramePr>
         <p:xfrm>
-          <a:off x="457200" y="2286000"/>
+          <a:off x="457200" y="2148840"/>
           <a:ext cx="11277295" cy="2743200"/>
         </p:xfrm>
         <a:graphic>
@@ -7427,14 +7541,14 @@
           <a:noFill/>
         </p:spPr>
         <p:txBody>
-          <a:bodyPr wrap="square" lIns="45720" rIns="45720" tIns="18288" bIns="18288">
-            <a:spAutoFit/>
+          <a:bodyPr wrap="square" anchor="ctr" lIns="0" rIns="0" tIns="0" bIns="0">
+            <a:noAutofit/>
           </a:bodyPr>
           <a:lstStyle/>
           <a:p>
             <a:pPr algn="l"/>
             <a:r>
-              <a:rPr sz="1100" b="0">
+              <a:rPr sz="1100" b="0" i="1">
                 <a:solidFill>
                   <a:srgbClr val="808080"/>
                 </a:solidFill>
@@ -7470,8 +7584,8 @@
         </p:nvSpPr>
         <p:spPr>
           <a:xfrm>
-            <a:off x="457200" y="457200"/>
-            <a:ext cx="11277295" cy="822960"/>
+            <a:off x="457200" y="365760"/>
+            <a:ext cx="11277295" cy="914400"/>
           </a:xfrm>
           <a:prstGeom prst="rect">
             <a:avLst/>
@@ -7479,14 +7593,14 @@
           <a:noFill/>
         </p:spPr>
         <p:txBody>
-          <a:bodyPr wrap="square" lIns="45720" rIns="45720" tIns="18288" bIns="18288">
-            <a:spAutoFit/>
+          <a:bodyPr wrap="square" anchor="ctr" lIns="0" rIns="0" tIns="0" bIns="0">
+            <a:noAutofit/>
           </a:bodyPr>
           <a:lstStyle/>
           <a:p>
             <a:pPr algn="l"/>
             <a:r>
-              <a:rPr sz="3000" b="1">
+              <a:rPr sz="2800" b="1" i="0">
                 <a:solidFill>
                   <a:srgbClr val="1F4E78"/>
                 </a:solidFill>
@@ -7504,8 +7618,8 @@
         </p:nvSpPr>
         <p:spPr>
           <a:xfrm>
-            <a:off x="457200" y="1234440"/>
-            <a:ext cx="1828800" cy="36576"/>
+            <a:off x="457200" y="1298448"/>
+            <a:ext cx="2194560" cy="36576"/>
           </a:xfrm>
           <a:prstGeom prst="rect">
             <a:avLst/>
@@ -7547,8 +7661,8 @@
         </p:nvSpPr>
         <p:spPr>
           <a:xfrm>
-            <a:off x="457200" y="1463040"/>
-            <a:ext cx="11277295" cy="640080"/>
+            <a:off x="457200" y="1508760"/>
+            <a:ext cx="11277295" cy="502920"/>
           </a:xfrm>
           <a:prstGeom prst="rect">
             <a:avLst/>
@@ -7556,14 +7670,14 @@
           <a:noFill/>
         </p:spPr>
         <p:txBody>
-          <a:bodyPr wrap="square" lIns="45720" rIns="45720" tIns="18288" bIns="18288">
-            <a:spAutoFit/>
+          <a:bodyPr wrap="square" anchor="ctr" lIns="0" rIns="0" tIns="0" bIns="0">
+            <a:noAutofit/>
           </a:bodyPr>
           <a:lstStyle/>
           <a:p>
             <a:pPr algn="l"/>
             <a:r>
-              <a:rPr sz="2200" b="1">
+              <a:rPr sz="2000" b="1" i="0">
                 <a:solidFill>
                   <a:srgbClr val="C0392B"/>
                 </a:solidFill>
@@ -7582,7 +7696,7 @@
           <p:nvPr/>
         </p:nvGraphicFramePr>
         <p:xfrm>
-          <a:off x="457200" y="2286000"/>
+          <a:off x="457200" y="2148840"/>
           <a:ext cx="11277295" cy="2286000"/>
         </p:xfrm>
         <a:graphic>
@@ -8077,8 +8191,8 @@
         </p:nvSpPr>
         <p:spPr>
           <a:xfrm>
-            <a:off x="457200" y="457200"/>
-            <a:ext cx="11277295" cy="822960"/>
+            <a:off x="457200" y="365760"/>
+            <a:ext cx="11277295" cy="914400"/>
           </a:xfrm>
           <a:prstGeom prst="rect">
             <a:avLst/>
@@ -8086,14 +8200,14 @@
           <a:noFill/>
         </p:spPr>
         <p:txBody>
-          <a:bodyPr wrap="square" lIns="45720" rIns="45720" tIns="18288" bIns="18288">
-            <a:spAutoFit/>
+          <a:bodyPr wrap="square" anchor="ctr" lIns="0" rIns="0" tIns="0" bIns="0">
+            <a:noAutofit/>
           </a:bodyPr>
           <a:lstStyle/>
           <a:p>
             <a:pPr algn="l"/>
             <a:r>
-              <a:rPr sz="3000" b="1">
+              <a:rPr sz="2800" b="1" i="0">
                 <a:solidFill>
                   <a:srgbClr val="1F4E78"/>
                 </a:solidFill>
@@ -8111,8 +8225,8 @@
         </p:nvSpPr>
         <p:spPr>
           <a:xfrm>
-            <a:off x="457200" y="1234440"/>
-            <a:ext cx="1828800" cy="36576"/>
+            <a:off x="457200" y="1298448"/>
+            <a:ext cx="2194560" cy="36576"/>
           </a:xfrm>
           <a:prstGeom prst="rect">
             <a:avLst/>
@@ -8154,8 +8268,8 @@
         </p:nvSpPr>
         <p:spPr>
           <a:xfrm>
-            <a:off x="457200" y="1463040"/>
-            <a:ext cx="11277295" cy="640080"/>
+            <a:off x="457200" y="1508760"/>
+            <a:ext cx="11277295" cy="502920"/>
           </a:xfrm>
           <a:prstGeom prst="rect">
             <a:avLst/>
@@ -8163,14 +8277,14 @@
           <a:noFill/>
         </p:spPr>
         <p:txBody>
-          <a:bodyPr wrap="square" lIns="45720" rIns="45720" tIns="18288" bIns="18288">
-            <a:spAutoFit/>
+          <a:bodyPr wrap="square" anchor="ctr" lIns="0" rIns="0" tIns="0" bIns="0">
+            <a:noAutofit/>
           </a:bodyPr>
           <a:lstStyle/>
           <a:p>
             <a:pPr algn="l"/>
             <a:r>
-              <a:rPr sz="2200" b="1">
+              <a:rPr sz="2000" b="1" i="0">
                 <a:solidFill>
                   <a:srgbClr val="C0392B"/>
                 </a:solidFill>
@@ -8189,7 +8303,7 @@
           <p:nvPr/>
         </p:nvGraphicFramePr>
         <p:xfrm>
-          <a:off x="457200" y="2286000"/>
+          <a:off x="457200" y="2148840"/>
           <a:ext cx="11277295" cy="1828800"/>
         </p:xfrm>
         <a:graphic>
@@ -8763,14 +8877,14 @@
           <a:noFill/>
         </p:spPr>
         <p:txBody>
-          <a:bodyPr wrap="square" lIns="45720" rIns="45720" tIns="18288" bIns="18288">
-            <a:spAutoFit/>
+          <a:bodyPr wrap="square" anchor="ctr" lIns="0" rIns="0" tIns="0" bIns="0">
+            <a:noAutofit/>
           </a:bodyPr>
           <a:lstStyle/>
           <a:p>
             <a:pPr algn="l"/>
             <a:r>
-              <a:rPr sz="1100" b="0">
+              <a:rPr sz="1100" b="0" i="1">
                 <a:solidFill>
                   <a:srgbClr val="808080"/>
                 </a:solidFill>
@@ -8806,8 +8920,8 @@
         </p:nvSpPr>
         <p:spPr>
           <a:xfrm>
-            <a:off x="457200" y="457200"/>
-            <a:ext cx="11277295" cy="822960"/>
+            <a:off x="457200" y="365760"/>
+            <a:ext cx="11277295" cy="914400"/>
           </a:xfrm>
           <a:prstGeom prst="rect">
             <a:avLst/>
@@ -8815,14 +8929,14 @@
           <a:noFill/>
         </p:spPr>
         <p:txBody>
-          <a:bodyPr wrap="square" lIns="45720" rIns="45720" tIns="18288" bIns="18288">
-            <a:spAutoFit/>
+          <a:bodyPr wrap="square" anchor="ctr" lIns="0" rIns="0" tIns="0" bIns="0">
+            <a:noAutofit/>
           </a:bodyPr>
           <a:lstStyle/>
           <a:p>
             <a:pPr algn="l"/>
             <a:r>
-              <a:rPr sz="3000" b="1">
+              <a:rPr sz="2800" b="1" i="0">
                 <a:solidFill>
                   <a:srgbClr val="1F4E78"/>
                 </a:solidFill>
@@ -8840,8 +8954,8 @@
         </p:nvSpPr>
         <p:spPr>
           <a:xfrm>
-            <a:off x="457200" y="1234440"/>
-            <a:ext cx="1828800" cy="36576"/>
+            <a:off x="457200" y="1298448"/>
+            <a:ext cx="2194560" cy="36576"/>
           </a:xfrm>
           <a:prstGeom prst="rect">
             <a:avLst/>
@@ -8883,8 +8997,8 @@
         </p:nvSpPr>
         <p:spPr>
           <a:xfrm>
-            <a:off x="457200" y="1463040"/>
-            <a:ext cx="11277295" cy="640080"/>
+            <a:off x="457200" y="1508760"/>
+            <a:ext cx="11277295" cy="502920"/>
           </a:xfrm>
           <a:prstGeom prst="rect">
             <a:avLst/>
@@ -8892,14 +9006,14 @@
           <a:noFill/>
         </p:spPr>
         <p:txBody>
-          <a:bodyPr wrap="square" lIns="45720" rIns="45720" tIns="18288" bIns="18288">
-            <a:spAutoFit/>
+          <a:bodyPr wrap="square" anchor="ctr" lIns="0" rIns="0" tIns="0" bIns="0">
+            <a:noAutofit/>
           </a:bodyPr>
           <a:lstStyle/>
           <a:p>
             <a:pPr algn="l"/>
             <a:r>
-              <a:rPr sz="2200" b="1">
+              <a:rPr sz="2000" b="1" i="0">
                 <a:solidFill>
                   <a:srgbClr val="C0392B"/>
                 </a:solidFill>
@@ -8918,7 +9032,7 @@
           <p:nvPr/>
         </p:nvGraphicFramePr>
         <p:xfrm>
-          <a:off x="457200" y="2286000"/>
+          <a:off x="457200" y="2148840"/>
           <a:ext cx="11277295" cy="1828800"/>
         </p:xfrm>
         <a:graphic>
@@ -9225,14 +9339,14 @@
           <a:noFill/>
         </p:spPr>
         <p:txBody>
-          <a:bodyPr wrap="square" lIns="45720" rIns="45720" tIns="18288" bIns="18288">
-            <a:spAutoFit/>
+          <a:bodyPr wrap="square" anchor="ctr" lIns="0" rIns="0" tIns="0" bIns="0">
+            <a:noAutofit/>
           </a:bodyPr>
           <a:lstStyle/>
           <a:p>
             <a:pPr algn="l"/>
             <a:r>
-              <a:rPr sz="1100" b="0">
+              <a:rPr sz="1100" b="0" i="1">
                 <a:solidFill>
                   <a:srgbClr val="808080"/>
                 </a:solidFill>
@@ -9268,8 +9382,8 @@
         </p:nvSpPr>
         <p:spPr>
           <a:xfrm>
-            <a:off x="457200" y="457200"/>
-            <a:ext cx="11277295" cy="822960"/>
+            <a:off x="457200" y="365760"/>
+            <a:ext cx="11277295" cy="914400"/>
           </a:xfrm>
           <a:prstGeom prst="rect">
             <a:avLst/>
@@ -9277,14 +9391,14 @@
           <a:noFill/>
         </p:spPr>
         <p:txBody>
-          <a:bodyPr wrap="square" lIns="45720" rIns="45720" tIns="18288" bIns="18288">
-            <a:spAutoFit/>
+          <a:bodyPr wrap="square" anchor="ctr" lIns="0" rIns="0" tIns="0" bIns="0">
+            <a:noAutofit/>
           </a:bodyPr>
           <a:lstStyle/>
           <a:p>
             <a:pPr algn="l"/>
             <a:r>
-              <a:rPr sz="3000" b="1">
+              <a:rPr sz="2800" b="1" i="0">
                 <a:solidFill>
                   <a:srgbClr val="1F4E78"/>
                 </a:solidFill>
@@ -9302,8 +9416,8 @@
         </p:nvSpPr>
         <p:spPr>
           <a:xfrm>
-            <a:off x="457200" y="1234440"/>
-            <a:ext cx="1828800" cy="36576"/>
+            <a:off x="457200" y="1298448"/>
+            <a:ext cx="2194560" cy="36576"/>
           </a:xfrm>
           <a:prstGeom prst="rect">
             <a:avLst/>
@@ -9345,8 +9459,8 @@
         </p:nvSpPr>
         <p:spPr>
           <a:xfrm>
-            <a:off x="457200" y="1463040"/>
-            <a:ext cx="11277295" cy="640080"/>
+            <a:off x="457200" y="1508760"/>
+            <a:ext cx="11277295" cy="502920"/>
           </a:xfrm>
           <a:prstGeom prst="rect">
             <a:avLst/>
@@ -9354,14 +9468,14 @@
           <a:noFill/>
         </p:spPr>
         <p:txBody>
-          <a:bodyPr wrap="square" lIns="45720" rIns="45720" tIns="18288" bIns="18288">
-            <a:spAutoFit/>
+          <a:bodyPr wrap="square" anchor="ctr" lIns="0" rIns="0" tIns="0" bIns="0">
+            <a:noAutofit/>
           </a:bodyPr>
           <a:lstStyle/>
           <a:p>
             <a:pPr algn="l"/>
             <a:r>
-              <a:rPr sz="2200" b="1">
+              <a:rPr sz="2000" b="1" i="0">
                 <a:solidFill>
                   <a:srgbClr val="C0392B"/>
                 </a:solidFill>
@@ -9379,8 +9493,8 @@
         </p:nvSpPr>
         <p:spPr>
           <a:xfrm>
-            <a:off x="731520" y="2286000"/>
-            <a:ext cx="10728655" cy="3977640"/>
+            <a:off x="731520" y="2148840"/>
+            <a:ext cx="10728655" cy="4114800"/>
           </a:xfrm>
           <a:prstGeom prst="rect">
             <a:avLst/>
@@ -9388,8 +9502,8 @@
           <a:noFill/>
         </p:spPr>
         <p:txBody>
-          <a:bodyPr wrap="none" tIns="91440">
-            <a:spAutoFit/>
+          <a:bodyPr wrap="none" anchor="t" tIns="91440">
+            <a:noAutofit/>
           </a:bodyPr>
           <a:lstStyle/>
           <a:p>
@@ -9439,8 +9553,8 @@
         </p:nvSpPr>
         <p:spPr>
           <a:xfrm>
-            <a:off x="457200" y="457200"/>
-            <a:ext cx="11277295" cy="822960"/>
+            <a:off x="457200" y="365760"/>
+            <a:ext cx="11277295" cy="914400"/>
           </a:xfrm>
           <a:prstGeom prst="rect">
             <a:avLst/>
@@ -9448,14 +9562,14 @@
           <a:noFill/>
         </p:spPr>
         <p:txBody>
-          <a:bodyPr wrap="square" lIns="45720" rIns="45720" tIns="18288" bIns="18288">
-            <a:spAutoFit/>
+          <a:bodyPr wrap="square" anchor="ctr" lIns="0" rIns="0" tIns="0" bIns="0">
+            <a:noAutofit/>
           </a:bodyPr>
           <a:lstStyle/>
           <a:p>
             <a:pPr algn="l"/>
             <a:r>
-              <a:rPr sz="3000" b="1">
+              <a:rPr sz="2800" b="1" i="0">
                 <a:solidFill>
                   <a:srgbClr val="1F4E78"/>
                 </a:solidFill>
@@ -9473,8 +9587,8 @@
         </p:nvSpPr>
         <p:spPr>
           <a:xfrm>
-            <a:off x="457200" y="1234440"/>
-            <a:ext cx="1828800" cy="36576"/>
+            <a:off x="457200" y="1298448"/>
+            <a:ext cx="2194560" cy="36576"/>
           </a:xfrm>
           <a:prstGeom prst="rect">
             <a:avLst/>
@@ -9516,8 +9630,8 @@
         </p:nvSpPr>
         <p:spPr>
           <a:xfrm>
-            <a:off x="822960" y="1463040"/>
-            <a:ext cx="10545775" cy="4892040"/>
+            <a:off x="822960" y="2148840"/>
+            <a:ext cx="10545775" cy="4114800"/>
           </a:xfrm>
           <a:prstGeom prst="rect">
             <a:avLst/>
@@ -9525,15 +9639,18 @@
           <a:noFill/>
         </p:spPr>
         <p:txBody>
-          <a:bodyPr wrap="square" lIns="45720" rIns="45720">
-            <a:spAutoFit/>
+          <a:bodyPr wrap="square" anchor="t" lIns="0" rIns="0" tIns="0" bIns="0">
+            <a:noAutofit/>
           </a:bodyPr>
           <a:lstStyle/>
           <a:p>
             <a:pPr algn="l">
               <a:lnSpc>
-                <a:spcPct val="130000"/>
+                <a:spcPct val="135000"/>
               </a:lnSpc>
+              <a:spcAft>
+                <a:spcPts val="600"/>
+              </a:spcAft>
             </a:pPr>
             <a:r>
               <a:rPr sz="2200">
@@ -9624,14 +9741,14 @@
           <a:noFill/>
         </p:spPr>
         <p:txBody>
-          <a:bodyPr wrap="square" lIns="45720" rIns="45720" tIns="18288" bIns="18288">
-            <a:spAutoFit/>
+          <a:bodyPr wrap="square" anchor="ctr" lIns="0" rIns="0" tIns="0" bIns="0">
+            <a:noAutofit/>
           </a:bodyPr>
           <a:lstStyle/>
           <a:p>
             <a:pPr algn="ctr"/>
             <a:r>
-              <a:rPr sz="5800" b="1">
+              <a:rPr sz="5800" b="1" i="0">
                 <a:solidFill>
                   <a:srgbClr val="FFFFFF"/>
                 </a:solidFill>
@@ -9667,8 +9784,8 @@
         </p:nvSpPr>
         <p:spPr>
           <a:xfrm>
-            <a:off x="457200" y="457200"/>
-            <a:ext cx="11277295" cy="822960"/>
+            <a:off x="457200" y="365760"/>
+            <a:ext cx="11277295" cy="914400"/>
           </a:xfrm>
           <a:prstGeom prst="rect">
             <a:avLst/>
@@ -9676,14 +9793,14 @@
           <a:noFill/>
         </p:spPr>
         <p:txBody>
-          <a:bodyPr wrap="square" lIns="45720" rIns="45720" tIns="18288" bIns="18288">
-            <a:spAutoFit/>
+          <a:bodyPr wrap="square" anchor="ctr" lIns="0" rIns="0" tIns="0" bIns="0">
+            <a:noAutofit/>
           </a:bodyPr>
           <a:lstStyle/>
           <a:p>
             <a:pPr algn="l"/>
             <a:r>
-              <a:rPr sz="3000" b="1">
+              <a:rPr sz="2800" b="1" i="0">
                 <a:solidFill>
                   <a:srgbClr val="1F4E78"/>
                 </a:solidFill>
@@ -9701,8 +9818,8 @@
         </p:nvSpPr>
         <p:spPr>
           <a:xfrm>
-            <a:off x="457200" y="1234440"/>
-            <a:ext cx="1828800" cy="36576"/>
+            <a:off x="457200" y="1298448"/>
+            <a:ext cx="2194560" cy="36576"/>
           </a:xfrm>
           <a:prstGeom prst="rect">
             <a:avLst/>
@@ -9744,8 +9861,8 @@
         </p:nvSpPr>
         <p:spPr>
           <a:xfrm>
-            <a:off x="457200" y="1463040"/>
-            <a:ext cx="11277295" cy="640080"/>
+            <a:off x="457200" y="1508760"/>
+            <a:ext cx="11277295" cy="502920"/>
           </a:xfrm>
           <a:prstGeom prst="rect">
             <a:avLst/>
@@ -9753,14 +9870,14 @@
           <a:noFill/>
         </p:spPr>
         <p:txBody>
-          <a:bodyPr wrap="square" lIns="45720" rIns="45720" tIns="18288" bIns="18288">
-            <a:spAutoFit/>
+          <a:bodyPr wrap="square" anchor="ctr" lIns="0" rIns="0" tIns="0" bIns="0">
+            <a:noAutofit/>
           </a:bodyPr>
           <a:lstStyle/>
           <a:p>
             <a:pPr algn="l"/>
             <a:r>
-              <a:rPr sz="2200" b="1">
+              <a:rPr sz="2000" b="1" i="0">
                 <a:solidFill>
                   <a:srgbClr val="C0392B"/>
                 </a:solidFill>
@@ -9778,8 +9895,8 @@
         </p:nvSpPr>
         <p:spPr>
           <a:xfrm>
-            <a:off x="640080" y="2286000"/>
-            <a:ext cx="10911535" cy="4069080"/>
+            <a:off x="640080" y="2148840"/>
+            <a:ext cx="10911535" cy="4114800"/>
           </a:xfrm>
           <a:prstGeom prst="rect">
             <a:avLst/>
@@ -9787,15 +9904,18 @@
           <a:noFill/>
         </p:spPr>
         <p:txBody>
-          <a:bodyPr wrap="square" lIns="45720" rIns="45720">
-            <a:spAutoFit/>
+          <a:bodyPr wrap="square" anchor="t" lIns="0" rIns="0" tIns="0" bIns="0">
+            <a:noAutofit/>
           </a:bodyPr>
           <a:lstStyle/>
           <a:p>
             <a:pPr algn="l">
               <a:lnSpc>
-                <a:spcPct val="130000"/>
+                <a:spcPct val="135000"/>
               </a:lnSpc>
+              <a:spcAft>
+                <a:spcPts val="600"/>
+              </a:spcAft>
             </a:pPr>
             <a:r>
               <a:rPr sz="1800">
@@ -9809,8 +9929,11 @@
           <a:p>
             <a:pPr algn="l">
               <a:lnSpc>
-                <a:spcPct val="130000"/>
+                <a:spcPct val="135000"/>
               </a:lnSpc>
+              <a:spcAft>
+                <a:spcPts val="600"/>
+              </a:spcAft>
             </a:pPr>
             <a:r>
               <a:rPr sz="1800">
@@ -9824,8 +9947,11 @@
           <a:p>
             <a:pPr algn="l">
               <a:lnSpc>
-                <a:spcPct val="130000"/>
+                <a:spcPct val="135000"/>
               </a:lnSpc>
+              <a:spcAft>
+                <a:spcPts val="600"/>
+              </a:spcAft>
             </a:pPr>
             <a:r>
               <a:rPr sz="1800">
@@ -9855,14 +9981,14 @@
           <a:noFill/>
         </p:spPr>
         <p:txBody>
-          <a:bodyPr wrap="square" lIns="45720" rIns="45720" tIns="18288" bIns="18288">
-            <a:spAutoFit/>
+          <a:bodyPr wrap="square" anchor="ctr" lIns="0" rIns="0" tIns="0" bIns="0">
+            <a:noAutofit/>
           </a:bodyPr>
           <a:lstStyle/>
           <a:p>
             <a:pPr algn="l"/>
             <a:r>
-              <a:rPr sz="1100" b="0">
+              <a:rPr sz="1100" b="0" i="1">
                 <a:solidFill>
                   <a:srgbClr val="808080"/>
                 </a:solidFill>
@@ -9898,8 +10024,8 @@
         </p:nvSpPr>
         <p:spPr>
           <a:xfrm>
-            <a:off x="457200" y="457200"/>
-            <a:ext cx="11277295" cy="822960"/>
+            <a:off x="457200" y="365760"/>
+            <a:ext cx="11277295" cy="914400"/>
           </a:xfrm>
           <a:prstGeom prst="rect">
             <a:avLst/>
@@ -9907,14 +10033,14 @@
           <a:noFill/>
         </p:spPr>
         <p:txBody>
-          <a:bodyPr wrap="square" lIns="45720" rIns="45720" tIns="18288" bIns="18288">
-            <a:spAutoFit/>
+          <a:bodyPr wrap="square" anchor="ctr" lIns="0" rIns="0" tIns="0" bIns="0">
+            <a:noAutofit/>
           </a:bodyPr>
           <a:lstStyle/>
           <a:p>
             <a:pPr algn="l"/>
             <a:r>
-              <a:rPr sz="3000" b="1">
+              <a:rPr sz="2800" b="1" i="0">
                 <a:solidFill>
                   <a:srgbClr val="1F4E78"/>
                 </a:solidFill>
@@ -9932,8 +10058,8 @@
         </p:nvSpPr>
         <p:spPr>
           <a:xfrm>
-            <a:off x="457200" y="1234440"/>
-            <a:ext cx="1828800" cy="36576"/>
+            <a:off x="457200" y="1298448"/>
+            <a:ext cx="2194560" cy="36576"/>
           </a:xfrm>
           <a:prstGeom prst="rect">
             <a:avLst/>
@@ -9975,8 +10101,8 @@
         </p:nvSpPr>
         <p:spPr>
           <a:xfrm>
-            <a:off x="457200" y="1463040"/>
-            <a:ext cx="11277295" cy="640080"/>
+            <a:off x="457200" y="1508760"/>
+            <a:ext cx="11277295" cy="502920"/>
           </a:xfrm>
           <a:prstGeom prst="rect">
             <a:avLst/>
@@ -9984,14 +10110,14 @@
           <a:noFill/>
         </p:spPr>
         <p:txBody>
-          <a:bodyPr wrap="square" lIns="45720" rIns="45720" tIns="18288" bIns="18288">
-            <a:spAutoFit/>
+          <a:bodyPr wrap="square" anchor="ctr" lIns="0" rIns="0" tIns="0" bIns="0">
+            <a:noAutofit/>
           </a:bodyPr>
           <a:lstStyle/>
           <a:p>
             <a:pPr algn="l"/>
             <a:r>
-              <a:rPr sz="2200" b="1">
+              <a:rPr sz="2000" b="1" i="0">
                 <a:solidFill>
                   <a:srgbClr val="C0392B"/>
                 </a:solidFill>
@@ -10009,8 +10135,8 @@
         </p:nvSpPr>
         <p:spPr>
           <a:xfrm>
-            <a:off x="640080" y="2286000"/>
-            <a:ext cx="10911535" cy="4069080"/>
+            <a:off x="640080" y="2148840"/>
+            <a:ext cx="10911535" cy="4114800"/>
           </a:xfrm>
           <a:prstGeom prst="rect">
             <a:avLst/>
@@ -10018,15 +10144,18 @@
           <a:noFill/>
         </p:spPr>
         <p:txBody>
-          <a:bodyPr wrap="square" lIns="45720" rIns="45720">
-            <a:spAutoFit/>
+          <a:bodyPr wrap="square" anchor="t" lIns="0" rIns="0" tIns="0" bIns="0">
+            <a:noAutofit/>
           </a:bodyPr>
           <a:lstStyle/>
           <a:p>
             <a:pPr algn="l">
               <a:lnSpc>
-                <a:spcPct val="130000"/>
+                <a:spcPct val="135000"/>
               </a:lnSpc>
+              <a:spcAft>
+                <a:spcPts val="600"/>
+              </a:spcAft>
             </a:pPr>
             <a:r>
               <a:rPr sz="1800">
@@ -10040,8 +10169,11 @@
           <a:p>
             <a:pPr algn="l">
               <a:lnSpc>
-                <a:spcPct val="130000"/>
+                <a:spcPct val="135000"/>
               </a:lnSpc>
+              <a:spcAft>
+                <a:spcPts val="600"/>
+              </a:spcAft>
             </a:pPr>
             <a:r>
               <a:rPr sz="1800">
@@ -10055,8 +10187,11 @@
           <a:p>
             <a:pPr algn="l">
               <a:lnSpc>
-                <a:spcPct val="130000"/>
+                <a:spcPct val="135000"/>
               </a:lnSpc>
+              <a:spcAft>
+                <a:spcPts val="600"/>
+              </a:spcAft>
             </a:pPr>
             <a:r>
               <a:rPr sz="1800">
@@ -10095,8 +10230,8 @@
         </p:nvSpPr>
         <p:spPr>
           <a:xfrm>
-            <a:off x="457200" y="457200"/>
-            <a:ext cx="11277295" cy="822960"/>
+            <a:off x="457200" y="365760"/>
+            <a:ext cx="11277295" cy="914400"/>
           </a:xfrm>
           <a:prstGeom prst="rect">
             <a:avLst/>
@@ -10104,14 +10239,14 @@
           <a:noFill/>
         </p:spPr>
         <p:txBody>
-          <a:bodyPr wrap="square" lIns="45720" rIns="45720" tIns="18288" bIns="18288">
-            <a:spAutoFit/>
+          <a:bodyPr wrap="square" anchor="ctr" lIns="0" rIns="0" tIns="0" bIns="0">
+            <a:noAutofit/>
           </a:bodyPr>
           <a:lstStyle/>
           <a:p>
             <a:pPr algn="l"/>
             <a:r>
-              <a:rPr sz="3000" b="1">
+              <a:rPr sz="2800" b="1" i="0">
                 <a:solidFill>
                   <a:srgbClr val="1F4E78"/>
                 </a:solidFill>
@@ -10129,8 +10264,8 @@
         </p:nvSpPr>
         <p:spPr>
           <a:xfrm>
-            <a:off x="457200" y="1234440"/>
-            <a:ext cx="1828800" cy="36576"/>
+            <a:off x="457200" y="1298448"/>
+            <a:ext cx="2194560" cy="36576"/>
           </a:xfrm>
           <a:prstGeom prst="rect">
             <a:avLst/>
@@ -10172,8 +10307,8 @@
         </p:nvSpPr>
         <p:spPr>
           <a:xfrm>
-            <a:off x="457200" y="1463040"/>
-            <a:ext cx="11277295" cy="640080"/>
+            <a:off x="457200" y="1508760"/>
+            <a:ext cx="11277295" cy="502920"/>
           </a:xfrm>
           <a:prstGeom prst="rect">
             <a:avLst/>
@@ -10181,14 +10316,14 @@
           <a:noFill/>
         </p:spPr>
         <p:txBody>
-          <a:bodyPr wrap="square" lIns="45720" rIns="45720" tIns="18288" bIns="18288">
-            <a:spAutoFit/>
+          <a:bodyPr wrap="square" anchor="ctr" lIns="0" rIns="0" tIns="0" bIns="0">
+            <a:noAutofit/>
           </a:bodyPr>
           <a:lstStyle/>
           <a:p>
             <a:pPr algn="l"/>
             <a:r>
-              <a:rPr sz="2200" b="1">
+              <a:rPr sz="2000" b="1" i="0">
                 <a:solidFill>
                   <a:srgbClr val="C0392B"/>
                 </a:solidFill>
@@ -10206,8 +10341,8 @@
         </p:nvSpPr>
         <p:spPr>
           <a:xfrm>
-            <a:off x="640080" y="2286000"/>
-            <a:ext cx="10911535" cy="4069080"/>
+            <a:off x="640080" y="2148840"/>
+            <a:ext cx="10911535" cy="4114800"/>
           </a:xfrm>
           <a:prstGeom prst="rect">
             <a:avLst/>
@@ -10215,15 +10350,18 @@
           <a:noFill/>
         </p:spPr>
         <p:txBody>
-          <a:bodyPr wrap="square" lIns="45720" rIns="45720">
-            <a:spAutoFit/>
+          <a:bodyPr wrap="square" anchor="t" lIns="0" rIns="0" tIns="0" bIns="0">
+            <a:noAutofit/>
           </a:bodyPr>
           <a:lstStyle/>
           <a:p>
             <a:pPr algn="l">
               <a:lnSpc>
-                <a:spcPct val="130000"/>
+                <a:spcPct val="135000"/>
               </a:lnSpc>
+              <a:spcAft>
+                <a:spcPts val="600"/>
+              </a:spcAft>
             </a:pPr>
             <a:r>
               <a:rPr sz="1800">
@@ -10237,8 +10375,11 @@
           <a:p>
             <a:pPr algn="l">
               <a:lnSpc>
-                <a:spcPct val="130000"/>
+                <a:spcPct val="135000"/>
               </a:lnSpc>
+              <a:spcAft>
+                <a:spcPts val="600"/>
+              </a:spcAft>
             </a:pPr>
             <a:r>
               <a:rPr sz="1800">
@@ -10252,8 +10393,11 @@
           <a:p>
             <a:pPr algn="l">
               <a:lnSpc>
-                <a:spcPct val="130000"/>
+                <a:spcPct val="135000"/>
               </a:lnSpc>
+              <a:spcAft>
+                <a:spcPts val="600"/>
+              </a:spcAft>
             </a:pPr>
             <a:r>
               <a:rPr sz="1800">
@@ -10292,8 +10436,8 @@
         </p:nvSpPr>
         <p:spPr>
           <a:xfrm>
-            <a:off x="457200" y="457200"/>
-            <a:ext cx="11277295" cy="822960"/>
+            <a:off x="457200" y="365760"/>
+            <a:ext cx="11277295" cy="914400"/>
           </a:xfrm>
           <a:prstGeom prst="rect">
             <a:avLst/>
@@ -10301,14 +10445,14 @@
           <a:noFill/>
         </p:spPr>
         <p:txBody>
-          <a:bodyPr wrap="square" lIns="45720" rIns="45720" tIns="18288" bIns="18288">
-            <a:spAutoFit/>
+          <a:bodyPr wrap="square" anchor="ctr" lIns="0" rIns="0" tIns="0" bIns="0">
+            <a:noAutofit/>
           </a:bodyPr>
           <a:lstStyle/>
           <a:p>
             <a:pPr algn="l"/>
             <a:r>
-              <a:rPr sz="3000" b="1">
+              <a:rPr sz="2800" b="1" i="0">
                 <a:solidFill>
                   <a:srgbClr val="1F4E78"/>
                 </a:solidFill>
@@ -10326,8 +10470,8 @@
         </p:nvSpPr>
         <p:spPr>
           <a:xfrm>
-            <a:off x="457200" y="1234440"/>
-            <a:ext cx="1828800" cy="36576"/>
+            <a:off x="457200" y="1298448"/>
+            <a:ext cx="2194560" cy="36576"/>
           </a:xfrm>
           <a:prstGeom prst="rect">
             <a:avLst/>
@@ -10369,8 +10513,8 @@
         </p:nvSpPr>
         <p:spPr>
           <a:xfrm>
-            <a:off x="457200" y="1463040"/>
-            <a:ext cx="11277295" cy="640080"/>
+            <a:off x="457200" y="1508760"/>
+            <a:ext cx="11277295" cy="502920"/>
           </a:xfrm>
           <a:prstGeom prst="rect">
             <a:avLst/>
@@ -10378,14 +10522,14 @@
           <a:noFill/>
         </p:spPr>
         <p:txBody>
-          <a:bodyPr wrap="square" lIns="45720" rIns="45720" tIns="18288" bIns="18288">
-            <a:spAutoFit/>
+          <a:bodyPr wrap="square" anchor="ctr" lIns="0" rIns="0" tIns="0" bIns="0">
+            <a:noAutofit/>
           </a:bodyPr>
           <a:lstStyle/>
           <a:p>
             <a:pPr algn="l"/>
             <a:r>
-              <a:rPr sz="2200" b="1">
+              <a:rPr sz="2000" b="1" i="0">
                 <a:solidFill>
                   <a:srgbClr val="C0392B"/>
                 </a:solidFill>
@@ -10403,8 +10547,8 @@
         </p:nvSpPr>
         <p:spPr>
           <a:xfrm>
-            <a:off x="640080" y="2286000"/>
-            <a:ext cx="10911535" cy="4069080"/>
+            <a:off x="640080" y="2148840"/>
+            <a:ext cx="10911535" cy="4114800"/>
           </a:xfrm>
           <a:prstGeom prst="rect">
             <a:avLst/>
@@ -10412,15 +10556,18 @@
           <a:noFill/>
         </p:spPr>
         <p:txBody>
-          <a:bodyPr wrap="square" lIns="45720" rIns="45720">
-            <a:spAutoFit/>
+          <a:bodyPr wrap="square" anchor="t" lIns="0" rIns="0" tIns="0" bIns="0">
+            <a:noAutofit/>
           </a:bodyPr>
           <a:lstStyle/>
           <a:p>
             <a:pPr algn="l">
               <a:lnSpc>
-                <a:spcPct val="130000"/>
+                <a:spcPct val="135000"/>
               </a:lnSpc>
+              <a:spcAft>
+                <a:spcPts val="600"/>
+              </a:spcAft>
             </a:pPr>
             <a:r>
               <a:rPr sz="1800">
@@ -10434,8 +10581,11 @@
           <a:p>
             <a:pPr algn="l">
               <a:lnSpc>
-                <a:spcPct val="130000"/>
+                <a:spcPct val="135000"/>
               </a:lnSpc>
+              <a:spcAft>
+                <a:spcPts val="600"/>
+              </a:spcAft>
             </a:pPr>
             <a:r>
               <a:rPr sz="1800">
@@ -10449,8 +10599,11 @@
           <a:p>
             <a:pPr algn="l">
               <a:lnSpc>
-                <a:spcPct val="130000"/>
+                <a:spcPct val="135000"/>
               </a:lnSpc>
+              <a:spcAft>
+                <a:spcPts val="600"/>
+              </a:spcAft>
             </a:pPr>
             <a:r>
               <a:rPr sz="1800">
@@ -10464,8 +10617,11 @@
           <a:p>
             <a:pPr algn="l">
               <a:lnSpc>
-                <a:spcPct val="130000"/>
+                <a:spcPct val="135000"/>
               </a:lnSpc>
+              <a:spcAft>
+                <a:spcPts val="600"/>
+              </a:spcAft>
             </a:pPr>
             <a:r>
               <a:rPr sz="1800">
@@ -10495,14 +10651,14 @@
           <a:noFill/>
         </p:spPr>
         <p:txBody>
-          <a:bodyPr wrap="square" lIns="45720" rIns="45720" tIns="18288" bIns="18288">
-            <a:spAutoFit/>
+          <a:bodyPr wrap="square" anchor="ctr" lIns="0" rIns="0" tIns="0" bIns="0">
+            <a:noAutofit/>
           </a:bodyPr>
           <a:lstStyle/>
           <a:p>
             <a:pPr algn="l"/>
             <a:r>
-              <a:rPr sz="1100" b="0">
+              <a:rPr sz="1100" b="0" i="1">
                 <a:solidFill>
                   <a:srgbClr val="808080"/>
                 </a:solidFill>
@@ -10538,8 +10694,8 @@
         </p:nvSpPr>
         <p:spPr>
           <a:xfrm>
-            <a:off x="457200" y="457200"/>
-            <a:ext cx="11277295" cy="822960"/>
+            <a:off x="457200" y="365760"/>
+            <a:ext cx="11277295" cy="914400"/>
           </a:xfrm>
           <a:prstGeom prst="rect">
             <a:avLst/>
@@ -10547,14 +10703,14 @@
           <a:noFill/>
         </p:spPr>
         <p:txBody>
-          <a:bodyPr wrap="square" lIns="45720" rIns="45720" tIns="18288" bIns="18288">
-            <a:spAutoFit/>
+          <a:bodyPr wrap="square" anchor="ctr" lIns="0" rIns="0" tIns="0" bIns="0">
+            <a:noAutofit/>
           </a:bodyPr>
           <a:lstStyle/>
           <a:p>
             <a:pPr algn="l"/>
             <a:r>
-              <a:rPr sz="3000" b="1">
+              <a:rPr sz="2800" b="1" i="0">
                 <a:solidFill>
                   <a:srgbClr val="1F4E78"/>
                 </a:solidFill>
@@ -10572,8 +10728,8 @@
         </p:nvSpPr>
         <p:spPr>
           <a:xfrm>
-            <a:off x="457200" y="1234440"/>
-            <a:ext cx="1828800" cy="36576"/>
+            <a:off x="457200" y="1298448"/>
+            <a:ext cx="2194560" cy="36576"/>
           </a:xfrm>
           <a:prstGeom prst="rect">
             <a:avLst/>
@@ -10615,8 +10771,8 @@
         </p:nvSpPr>
         <p:spPr>
           <a:xfrm>
-            <a:off x="457200" y="1463040"/>
-            <a:ext cx="11277295" cy="640080"/>
+            <a:off x="457200" y="1508760"/>
+            <a:ext cx="11277295" cy="502920"/>
           </a:xfrm>
           <a:prstGeom prst="rect">
             <a:avLst/>
@@ -10624,14 +10780,14 @@
           <a:noFill/>
         </p:spPr>
         <p:txBody>
-          <a:bodyPr wrap="square" lIns="45720" rIns="45720" tIns="18288" bIns="18288">
-            <a:spAutoFit/>
+          <a:bodyPr wrap="square" anchor="ctr" lIns="0" rIns="0" tIns="0" bIns="0">
+            <a:noAutofit/>
           </a:bodyPr>
           <a:lstStyle/>
           <a:p>
             <a:pPr algn="l"/>
             <a:r>
-              <a:rPr sz="2200" b="1">
+              <a:rPr sz="2000" b="1" i="0">
                 <a:solidFill>
                   <a:srgbClr val="C0392B"/>
                 </a:solidFill>
@@ -10649,8 +10805,8 @@
         </p:nvSpPr>
         <p:spPr>
           <a:xfrm>
-            <a:off x="640080" y="2286000"/>
-            <a:ext cx="10911535" cy="4069080"/>
+            <a:off x="640080" y="2148840"/>
+            <a:ext cx="10911535" cy="4114800"/>
           </a:xfrm>
           <a:prstGeom prst="rect">
             <a:avLst/>
@@ -10658,15 +10814,18 @@
           <a:noFill/>
         </p:spPr>
         <p:txBody>
-          <a:bodyPr wrap="square" lIns="45720" rIns="45720">
-            <a:spAutoFit/>
+          <a:bodyPr wrap="square" anchor="t" lIns="0" rIns="0" tIns="0" bIns="0">
+            <a:noAutofit/>
           </a:bodyPr>
           <a:lstStyle/>
           <a:p>
             <a:pPr algn="l">
               <a:lnSpc>
-                <a:spcPct val="130000"/>
+                <a:spcPct val="135000"/>
               </a:lnSpc>
+              <a:spcAft>
+                <a:spcPts val="600"/>
+              </a:spcAft>
             </a:pPr>
             <a:r>
               <a:rPr sz="1800">
@@ -10680,8 +10839,11 @@
           <a:p>
             <a:pPr algn="l">
               <a:lnSpc>
-                <a:spcPct val="130000"/>
+                <a:spcPct val="135000"/>
               </a:lnSpc>
+              <a:spcAft>
+                <a:spcPts val="600"/>
+              </a:spcAft>
             </a:pPr>
             <a:r>
               <a:rPr sz="1800">
@@ -10695,8 +10857,11 @@
           <a:p>
             <a:pPr algn="l">
               <a:lnSpc>
-                <a:spcPct val="130000"/>
+                <a:spcPct val="135000"/>
               </a:lnSpc>
+              <a:spcAft>
+                <a:spcPts val="600"/>
+              </a:spcAft>
             </a:pPr>
             <a:r>
               <a:rPr sz="1800">
@@ -10710,8 +10875,11 @@
           <a:p>
             <a:pPr algn="l">
               <a:lnSpc>
-                <a:spcPct val="130000"/>
+                <a:spcPct val="135000"/>
               </a:lnSpc>
+              <a:spcAft>
+                <a:spcPts val="600"/>
+              </a:spcAft>
             </a:pPr>
             <a:r>
               <a:rPr sz="1800">
@@ -10750,8 +10918,8 @@
         </p:nvSpPr>
         <p:spPr>
           <a:xfrm>
-            <a:off x="457200" y="457200"/>
-            <a:ext cx="11277295" cy="822960"/>
+            <a:off x="457200" y="365760"/>
+            <a:ext cx="11277295" cy="914400"/>
           </a:xfrm>
           <a:prstGeom prst="rect">
             <a:avLst/>
@@ -10759,14 +10927,14 @@
           <a:noFill/>
         </p:spPr>
         <p:txBody>
-          <a:bodyPr wrap="square" lIns="45720" rIns="45720" tIns="18288" bIns="18288">
-            <a:spAutoFit/>
+          <a:bodyPr wrap="square" anchor="ctr" lIns="0" rIns="0" tIns="0" bIns="0">
+            <a:noAutofit/>
           </a:bodyPr>
           <a:lstStyle/>
           <a:p>
             <a:pPr algn="l"/>
             <a:r>
-              <a:rPr sz="3000" b="1">
+              <a:rPr sz="2800" b="1" i="0">
                 <a:solidFill>
                   <a:srgbClr val="1F4E78"/>
                 </a:solidFill>
@@ -10784,8 +10952,8 @@
         </p:nvSpPr>
         <p:spPr>
           <a:xfrm>
-            <a:off x="457200" y="1234440"/>
-            <a:ext cx="1828800" cy="36576"/>
+            <a:off x="457200" y="1298448"/>
+            <a:ext cx="2194560" cy="36576"/>
           </a:xfrm>
           <a:prstGeom prst="rect">
             <a:avLst/>
@@ -10827,8 +10995,8 @@
         </p:nvSpPr>
         <p:spPr>
           <a:xfrm>
-            <a:off x="457200" y="1463040"/>
-            <a:ext cx="11277295" cy="640080"/>
+            <a:off x="457200" y="1508760"/>
+            <a:ext cx="11277295" cy="502920"/>
           </a:xfrm>
           <a:prstGeom prst="rect">
             <a:avLst/>
@@ -10836,14 +11004,14 @@
           <a:noFill/>
         </p:spPr>
         <p:txBody>
-          <a:bodyPr wrap="square" lIns="45720" rIns="45720" tIns="18288" bIns="18288">
-            <a:spAutoFit/>
+          <a:bodyPr wrap="square" anchor="ctr" lIns="0" rIns="0" tIns="0" bIns="0">
+            <a:noAutofit/>
           </a:bodyPr>
           <a:lstStyle/>
           <a:p>
             <a:pPr algn="l"/>
             <a:r>
-              <a:rPr sz="2200" b="1">
+              <a:rPr sz="2000" b="1" i="0">
                 <a:solidFill>
                   <a:srgbClr val="C0392B"/>
                 </a:solidFill>
@@ -10861,8 +11029,8 @@
         </p:nvSpPr>
         <p:spPr>
           <a:xfrm>
-            <a:off x="640080" y="2286000"/>
-            <a:ext cx="10911535" cy="4069080"/>
+            <a:off x="640080" y="2148840"/>
+            <a:ext cx="10911535" cy="4114800"/>
           </a:xfrm>
           <a:prstGeom prst="rect">
             <a:avLst/>
@@ -10870,15 +11038,18 @@
           <a:noFill/>
         </p:spPr>
         <p:txBody>
-          <a:bodyPr wrap="square" lIns="45720" rIns="45720">
-            <a:spAutoFit/>
+          <a:bodyPr wrap="square" anchor="t" lIns="0" rIns="0" tIns="0" bIns="0">
+            <a:noAutofit/>
           </a:bodyPr>
           <a:lstStyle/>
           <a:p>
             <a:pPr algn="l">
               <a:lnSpc>
-                <a:spcPct val="130000"/>
+                <a:spcPct val="135000"/>
               </a:lnSpc>
+              <a:spcAft>
+                <a:spcPts val="600"/>
+              </a:spcAft>
             </a:pPr>
             <a:r>
               <a:rPr sz="1800">
@@ -10892,8 +11063,11 @@
           <a:p>
             <a:pPr algn="l">
               <a:lnSpc>
-                <a:spcPct val="130000"/>
+                <a:spcPct val="135000"/>
               </a:lnSpc>
+              <a:spcAft>
+                <a:spcPts val="600"/>
+              </a:spcAft>
             </a:pPr>
             <a:r>
               <a:rPr sz="1800">
@@ -10923,14 +11097,14 @@
           <a:noFill/>
         </p:spPr>
         <p:txBody>
-          <a:bodyPr wrap="square" lIns="45720" rIns="45720" tIns="18288" bIns="18288">
-            <a:spAutoFit/>
+          <a:bodyPr wrap="square" anchor="ctr" lIns="0" rIns="0" tIns="0" bIns="0">
+            <a:noAutofit/>
           </a:bodyPr>
           <a:lstStyle/>
           <a:p>
             <a:pPr algn="l"/>
             <a:r>
-              <a:rPr sz="1100" b="0">
+              <a:rPr sz="1100" b="0" i="1">
                 <a:solidFill>
                   <a:srgbClr val="808080"/>
                 </a:solidFill>
@@ -10966,8 +11140,8 @@
         </p:nvSpPr>
         <p:spPr>
           <a:xfrm>
-            <a:off x="457200" y="457200"/>
-            <a:ext cx="11277295" cy="822960"/>
+            <a:off x="457200" y="365760"/>
+            <a:ext cx="11277295" cy="914400"/>
           </a:xfrm>
           <a:prstGeom prst="rect">
             <a:avLst/>
@@ -10975,14 +11149,14 @@
           <a:noFill/>
         </p:spPr>
         <p:txBody>
-          <a:bodyPr wrap="square" lIns="45720" rIns="45720" tIns="18288" bIns="18288">
-            <a:spAutoFit/>
+          <a:bodyPr wrap="square" anchor="ctr" lIns="0" rIns="0" tIns="0" bIns="0">
+            <a:noAutofit/>
           </a:bodyPr>
           <a:lstStyle/>
           <a:p>
             <a:pPr algn="l"/>
             <a:r>
-              <a:rPr sz="3000" b="1">
+              <a:rPr sz="2800" b="1" i="0">
                 <a:solidFill>
                   <a:srgbClr val="1F4E78"/>
                 </a:solidFill>
@@ -11000,8 +11174,8 @@
         </p:nvSpPr>
         <p:spPr>
           <a:xfrm>
-            <a:off x="457200" y="1234440"/>
-            <a:ext cx="1828800" cy="36576"/>
+            <a:off x="457200" y="1298448"/>
+            <a:ext cx="2194560" cy="36576"/>
           </a:xfrm>
           <a:prstGeom prst="rect">
             <a:avLst/>
@@ -11043,8 +11217,8 @@
         </p:nvSpPr>
         <p:spPr>
           <a:xfrm>
-            <a:off x="457200" y="1463040"/>
-            <a:ext cx="11277295" cy="640080"/>
+            <a:off x="457200" y="1508760"/>
+            <a:ext cx="11277295" cy="502920"/>
           </a:xfrm>
           <a:prstGeom prst="rect">
             <a:avLst/>
@@ -11052,14 +11226,14 @@
           <a:noFill/>
         </p:spPr>
         <p:txBody>
-          <a:bodyPr wrap="square" lIns="45720" rIns="45720" tIns="18288" bIns="18288">
-            <a:spAutoFit/>
+          <a:bodyPr wrap="square" anchor="ctr" lIns="0" rIns="0" tIns="0" bIns="0">
+            <a:noAutofit/>
           </a:bodyPr>
           <a:lstStyle/>
           <a:p>
             <a:pPr algn="l"/>
             <a:r>
-              <a:rPr sz="2200" b="1">
+              <a:rPr sz="2000" b="1" i="0">
                 <a:solidFill>
                   <a:srgbClr val="C0392B"/>
                 </a:solidFill>
@@ -11078,7 +11252,7 @@
           <p:nvPr/>
         </p:nvGraphicFramePr>
         <p:xfrm>
-          <a:off x="457200" y="2286000"/>
+          <a:off x="457200" y="2148840"/>
           <a:ext cx="11277295" cy="2743200"/>
         </p:xfrm>
         <a:graphic>
@@ -11530,8 +11704,8 @@
         </p:nvSpPr>
         <p:spPr>
           <a:xfrm>
-            <a:off x="457200" y="457200"/>
-            <a:ext cx="11277295" cy="822960"/>
+            <a:off x="457200" y="365760"/>
+            <a:ext cx="11277295" cy="914400"/>
           </a:xfrm>
           <a:prstGeom prst="rect">
             <a:avLst/>
@@ -11539,14 +11713,14 @@
           <a:noFill/>
         </p:spPr>
         <p:txBody>
-          <a:bodyPr wrap="square" lIns="45720" rIns="45720" tIns="18288" bIns="18288">
-            <a:spAutoFit/>
+          <a:bodyPr wrap="square" anchor="ctr" lIns="0" rIns="0" tIns="0" bIns="0">
+            <a:noAutofit/>
           </a:bodyPr>
           <a:lstStyle/>
           <a:p>
             <a:pPr algn="l"/>
             <a:r>
-              <a:rPr sz="3000" b="1">
+              <a:rPr sz="2800" b="1" i="0">
                 <a:solidFill>
                   <a:srgbClr val="1F4E78"/>
                 </a:solidFill>
@@ -11564,8 +11738,8 @@
         </p:nvSpPr>
         <p:spPr>
           <a:xfrm>
-            <a:off x="457200" y="1234440"/>
-            <a:ext cx="1828800" cy="36576"/>
+            <a:off x="457200" y="1298448"/>
+            <a:ext cx="2194560" cy="36576"/>
           </a:xfrm>
           <a:prstGeom prst="rect">
             <a:avLst/>
@@ -11607,8 +11781,8 @@
         </p:nvSpPr>
         <p:spPr>
           <a:xfrm>
-            <a:off x="457200" y="1463040"/>
-            <a:ext cx="11277295" cy="640080"/>
+            <a:off x="457200" y="1508760"/>
+            <a:ext cx="11277295" cy="502920"/>
           </a:xfrm>
           <a:prstGeom prst="rect">
             <a:avLst/>
@@ -11616,14 +11790,14 @@
           <a:noFill/>
         </p:spPr>
         <p:txBody>
-          <a:bodyPr wrap="square" lIns="45720" rIns="45720" tIns="18288" bIns="18288">
-            <a:spAutoFit/>
+          <a:bodyPr wrap="square" anchor="ctr" lIns="0" rIns="0" tIns="0" bIns="0">
+            <a:noAutofit/>
           </a:bodyPr>
           <a:lstStyle/>
           <a:p>
             <a:pPr algn="l"/>
             <a:r>
-              <a:rPr sz="2200" b="1">
+              <a:rPr sz="2000" b="1" i="0">
                 <a:solidFill>
                   <a:srgbClr val="C0392B"/>
                 </a:solidFill>
@@ -11641,8 +11815,8 @@
         </p:nvSpPr>
         <p:spPr>
           <a:xfrm>
-            <a:off x="640080" y="2286000"/>
-            <a:ext cx="10911535" cy="4069080"/>
+            <a:off x="640080" y="2148840"/>
+            <a:ext cx="10911535" cy="4114800"/>
           </a:xfrm>
           <a:prstGeom prst="rect">
             <a:avLst/>
@@ -11650,15 +11824,18 @@
           <a:noFill/>
         </p:spPr>
         <p:txBody>
-          <a:bodyPr wrap="square" lIns="45720" rIns="45720">
-            <a:spAutoFit/>
+          <a:bodyPr wrap="square" anchor="t" lIns="0" rIns="0" tIns="0" bIns="0">
+            <a:noAutofit/>
           </a:bodyPr>
           <a:lstStyle/>
           <a:p>
             <a:pPr algn="l">
               <a:lnSpc>
-                <a:spcPct val="130000"/>
+                <a:spcPct val="135000"/>
               </a:lnSpc>
+              <a:spcAft>
+                <a:spcPts val="600"/>
+              </a:spcAft>
             </a:pPr>
             <a:r>
               <a:rPr sz="1800">
@@ -11672,8 +11849,11 @@
           <a:p>
             <a:pPr algn="l">
               <a:lnSpc>
-                <a:spcPct val="130000"/>
+                <a:spcPct val="135000"/>
               </a:lnSpc>
+              <a:spcAft>
+                <a:spcPts val="600"/>
+              </a:spcAft>
             </a:pPr>
             <a:r>
               <a:rPr sz="1800">
@@ -11687,8 +11867,11 @@
           <a:p>
             <a:pPr algn="l">
               <a:lnSpc>
-                <a:spcPct val="130000"/>
+                <a:spcPct val="135000"/>
               </a:lnSpc>
+              <a:spcAft>
+                <a:spcPts val="600"/>
+              </a:spcAft>
             </a:pPr>
             <a:r>
               <a:rPr sz="1800">
@@ -11702,8 +11885,11 @@
           <a:p>
             <a:pPr algn="l">
               <a:lnSpc>
-                <a:spcPct val="130000"/>
+                <a:spcPct val="135000"/>
               </a:lnSpc>
+              <a:spcAft>
+                <a:spcPts val="600"/>
+              </a:spcAft>
             </a:pPr>
             <a:r>
               <a:rPr sz="1800">
@@ -11742,8 +11928,8 @@
         </p:nvSpPr>
         <p:spPr>
           <a:xfrm>
-            <a:off x="457200" y="457200"/>
-            <a:ext cx="11277295" cy="822960"/>
+            <a:off x="457200" y="365760"/>
+            <a:ext cx="11277295" cy="914400"/>
           </a:xfrm>
           <a:prstGeom prst="rect">
             <a:avLst/>
@@ -11751,14 +11937,14 @@
           <a:noFill/>
         </p:spPr>
         <p:txBody>
-          <a:bodyPr wrap="square" lIns="45720" rIns="45720" tIns="18288" bIns="18288">
-            <a:spAutoFit/>
+          <a:bodyPr wrap="square" anchor="ctr" lIns="0" rIns="0" tIns="0" bIns="0">
+            <a:noAutofit/>
           </a:bodyPr>
           <a:lstStyle/>
           <a:p>
             <a:pPr algn="l"/>
             <a:r>
-              <a:rPr sz="3000" b="1">
+              <a:rPr sz="2800" b="1" i="0">
                 <a:solidFill>
                   <a:srgbClr val="1F4E78"/>
                 </a:solidFill>
@@ -11776,8 +11962,8 @@
         </p:nvSpPr>
         <p:spPr>
           <a:xfrm>
-            <a:off x="457200" y="1234440"/>
-            <a:ext cx="1828800" cy="36576"/>
+            <a:off x="457200" y="1298448"/>
+            <a:ext cx="2194560" cy="36576"/>
           </a:xfrm>
           <a:prstGeom prst="rect">
             <a:avLst/>
@@ -11819,8 +12005,8 @@
         </p:nvSpPr>
         <p:spPr>
           <a:xfrm>
-            <a:off x="822960" y="1463040"/>
-            <a:ext cx="10545775" cy="4892040"/>
+            <a:off x="822960" y="2148840"/>
+            <a:ext cx="10545775" cy="4114800"/>
           </a:xfrm>
           <a:prstGeom prst="rect">
             <a:avLst/>
@@ -11828,15 +12014,18 @@
           <a:noFill/>
         </p:spPr>
         <p:txBody>
-          <a:bodyPr wrap="square" lIns="45720" rIns="45720">
-            <a:spAutoFit/>
+          <a:bodyPr wrap="square" anchor="t" lIns="0" rIns="0" tIns="0" bIns="0">
+            <a:noAutofit/>
           </a:bodyPr>
           <a:lstStyle/>
           <a:p>
             <a:pPr algn="l">
               <a:lnSpc>
-                <a:spcPct val="130000"/>
+                <a:spcPct val="135000"/>
               </a:lnSpc>
+              <a:spcAft>
+                <a:spcPts val="600"/>
+              </a:spcAft>
             </a:pPr>
             <a:r>
               <a:rPr sz="2200">
@@ -11850,8 +12039,11 @@
           <a:p>
             <a:pPr algn="l">
               <a:lnSpc>
-                <a:spcPct val="130000"/>
+                <a:spcPct val="135000"/>
               </a:lnSpc>
+              <a:spcAft>
+                <a:spcPts val="600"/>
+              </a:spcAft>
             </a:pPr>
             <a:r>
               <a:rPr sz="2200">
@@ -11865,8 +12057,11 @@
           <a:p>
             <a:pPr algn="l">
               <a:lnSpc>
-                <a:spcPct val="130000"/>
+                <a:spcPct val="135000"/>
               </a:lnSpc>
+              <a:spcAft>
+                <a:spcPts val="600"/>
+              </a:spcAft>
             </a:pPr>
             <a:r>
               <a:rPr sz="2200">
@@ -11880,8 +12075,11 @@
           <a:p>
             <a:pPr algn="l">
               <a:lnSpc>
-                <a:spcPct val="130000"/>
+                <a:spcPct val="135000"/>
               </a:lnSpc>
+              <a:spcAft>
+                <a:spcPts val="600"/>
+              </a:spcAft>
             </a:pPr>
             <a:r>
               <a:rPr sz="2200">
@@ -11895,8 +12093,11 @@
           <a:p>
             <a:pPr algn="l">
               <a:lnSpc>
-                <a:spcPct val="130000"/>
+                <a:spcPct val="135000"/>
               </a:lnSpc>
+              <a:spcAft>
+                <a:spcPts val="600"/>
+              </a:spcAft>
             </a:pPr>
             <a:r>
               <a:rPr sz="2200">
@@ -11987,14 +12188,14 @@
           <a:noFill/>
         </p:spPr>
         <p:txBody>
-          <a:bodyPr wrap="square" lIns="45720" rIns="45720" tIns="18288" bIns="18288">
-            <a:spAutoFit/>
+          <a:bodyPr wrap="square" anchor="ctr" lIns="0" rIns="0" tIns="0" bIns="0">
+            <a:noAutofit/>
           </a:bodyPr>
           <a:lstStyle/>
           <a:p>
             <a:pPr algn="ctr"/>
             <a:r>
-              <a:rPr sz="5800" b="1">
+              <a:rPr sz="5800" b="1" i="0">
                 <a:solidFill>
                   <a:srgbClr val="FFFFFF"/>
                 </a:solidFill>
@@ -12030,8 +12231,8 @@
         </p:nvSpPr>
         <p:spPr>
           <a:xfrm>
-            <a:off x="457200" y="457200"/>
-            <a:ext cx="11277295" cy="822960"/>
+            <a:off x="457200" y="365760"/>
+            <a:ext cx="11277295" cy="914400"/>
           </a:xfrm>
           <a:prstGeom prst="rect">
             <a:avLst/>
@@ -12039,14 +12240,14 @@
           <a:noFill/>
         </p:spPr>
         <p:txBody>
-          <a:bodyPr wrap="square" lIns="45720" rIns="45720" tIns="18288" bIns="18288">
-            <a:spAutoFit/>
+          <a:bodyPr wrap="square" anchor="ctr" lIns="0" rIns="0" tIns="0" bIns="0">
+            <a:noAutofit/>
           </a:bodyPr>
           <a:lstStyle/>
           <a:p>
             <a:pPr algn="l"/>
             <a:r>
-              <a:rPr sz="3000" b="1">
+              <a:rPr sz="2800" b="1" i="0">
                 <a:solidFill>
                   <a:srgbClr val="1F4E78"/>
                 </a:solidFill>
@@ -12064,8 +12265,8 @@
         </p:nvSpPr>
         <p:spPr>
           <a:xfrm>
-            <a:off x="457200" y="1234440"/>
-            <a:ext cx="1828800" cy="36576"/>
+            <a:off x="457200" y="1298448"/>
+            <a:ext cx="2194560" cy="36576"/>
           </a:xfrm>
           <a:prstGeom prst="rect">
             <a:avLst/>
@@ -12107,8 +12308,8 @@
         </p:nvSpPr>
         <p:spPr>
           <a:xfrm>
-            <a:off x="457200" y="1463040"/>
-            <a:ext cx="11277295" cy="640080"/>
+            <a:off x="457200" y="1508760"/>
+            <a:ext cx="11277295" cy="502920"/>
           </a:xfrm>
           <a:prstGeom prst="rect">
             <a:avLst/>
@@ -12116,14 +12317,14 @@
           <a:noFill/>
         </p:spPr>
         <p:txBody>
-          <a:bodyPr wrap="square" lIns="45720" rIns="45720" tIns="18288" bIns="18288">
-            <a:spAutoFit/>
+          <a:bodyPr wrap="square" anchor="ctr" lIns="0" rIns="0" tIns="0" bIns="0">
+            <a:noAutofit/>
           </a:bodyPr>
           <a:lstStyle/>
           <a:p>
             <a:pPr algn="l"/>
             <a:r>
-              <a:rPr sz="2200" b="1">
+              <a:rPr sz="2000" b="1" i="0">
                 <a:solidFill>
                   <a:srgbClr val="C0392B"/>
                 </a:solidFill>
@@ -12142,7 +12343,7 @@
           <p:nvPr/>
         </p:nvGraphicFramePr>
         <p:xfrm>
-          <a:off x="457200" y="2286000"/>
+          <a:off x="457200" y="2148840"/>
           <a:ext cx="11277295" cy="3200400"/>
         </p:xfrm>
         <a:graphic>
@@ -12507,8 +12708,8 @@
         </p:nvSpPr>
         <p:spPr>
           <a:xfrm>
-            <a:off x="457200" y="457200"/>
-            <a:ext cx="11277295" cy="822960"/>
+            <a:off x="457200" y="365760"/>
+            <a:ext cx="11277295" cy="914400"/>
           </a:xfrm>
           <a:prstGeom prst="rect">
             <a:avLst/>
@@ -12516,14 +12717,14 @@
           <a:noFill/>
         </p:spPr>
         <p:txBody>
-          <a:bodyPr wrap="square" lIns="45720" rIns="45720" tIns="18288" bIns="18288">
-            <a:spAutoFit/>
+          <a:bodyPr wrap="square" anchor="ctr" lIns="0" rIns="0" tIns="0" bIns="0">
+            <a:noAutofit/>
           </a:bodyPr>
           <a:lstStyle/>
           <a:p>
             <a:pPr algn="l"/>
             <a:r>
-              <a:rPr sz="3000" b="1">
+              <a:rPr sz="2800" b="1" i="0">
                 <a:solidFill>
                   <a:srgbClr val="1F4E78"/>
                 </a:solidFill>
@@ -12541,8 +12742,8 @@
         </p:nvSpPr>
         <p:spPr>
           <a:xfrm>
-            <a:off x="457200" y="1234440"/>
-            <a:ext cx="1828800" cy="36576"/>
+            <a:off x="457200" y="1298448"/>
+            <a:ext cx="2194560" cy="36576"/>
           </a:xfrm>
           <a:prstGeom prst="rect">
             <a:avLst/>
@@ -12584,8 +12785,8 @@
         </p:nvSpPr>
         <p:spPr>
           <a:xfrm>
-            <a:off x="457200" y="1463040"/>
-            <a:ext cx="11277295" cy="640080"/>
+            <a:off x="457200" y="1508760"/>
+            <a:ext cx="11277295" cy="502920"/>
           </a:xfrm>
           <a:prstGeom prst="rect">
             <a:avLst/>
@@ -12593,14 +12794,14 @@
           <a:noFill/>
         </p:spPr>
         <p:txBody>
-          <a:bodyPr wrap="square" lIns="45720" rIns="45720" tIns="18288" bIns="18288">
-            <a:spAutoFit/>
+          <a:bodyPr wrap="square" anchor="ctr" lIns="0" rIns="0" tIns="0" bIns="0">
+            <a:noAutofit/>
           </a:bodyPr>
           <a:lstStyle/>
           <a:p>
             <a:pPr algn="l"/>
             <a:r>
-              <a:rPr sz="2200" b="1">
+              <a:rPr sz="2000" b="1" i="0">
                 <a:solidFill>
                   <a:srgbClr val="C0392B"/>
                 </a:solidFill>
@@ -12618,8 +12819,8 @@
         </p:nvSpPr>
         <p:spPr>
           <a:xfrm>
-            <a:off x="640080" y="2286000"/>
-            <a:ext cx="10911535" cy="4069080"/>
+            <a:off x="640080" y="2148840"/>
+            <a:ext cx="10911535" cy="4114800"/>
           </a:xfrm>
           <a:prstGeom prst="rect">
             <a:avLst/>
@@ -12627,15 +12828,18 @@
           <a:noFill/>
         </p:spPr>
         <p:txBody>
-          <a:bodyPr wrap="square" lIns="45720" rIns="45720">
-            <a:spAutoFit/>
+          <a:bodyPr wrap="square" anchor="t" lIns="0" rIns="0" tIns="0" bIns="0">
+            <a:noAutofit/>
           </a:bodyPr>
           <a:lstStyle/>
           <a:p>
             <a:pPr algn="l">
               <a:lnSpc>
-                <a:spcPct val="130000"/>
+                <a:spcPct val="135000"/>
               </a:lnSpc>
+              <a:spcAft>
+                <a:spcPts val="600"/>
+              </a:spcAft>
             </a:pPr>
             <a:r>
               <a:rPr sz="1800">
@@ -12649,8 +12853,11 @@
           <a:p>
             <a:pPr algn="l">
               <a:lnSpc>
-                <a:spcPct val="130000"/>
+                <a:spcPct val="135000"/>
               </a:lnSpc>
+              <a:spcAft>
+                <a:spcPts val="600"/>
+              </a:spcAft>
             </a:pPr>
             <a:r>
               <a:rPr sz="1800">
@@ -12664,8 +12871,11 @@
           <a:p>
             <a:pPr algn="l">
               <a:lnSpc>
-                <a:spcPct val="130000"/>
+                <a:spcPct val="135000"/>
               </a:lnSpc>
+              <a:spcAft>
+                <a:spcPts val="600"/>
+              </a:spcAft>
             </a:pPr>
             <a:r>
               <a:rPr sz="1800">
